--- a/docs/PRAHARI_Pitch_Deck.pptx
+++ b/docs/PRAHARI_Pitch_Deck.pptx
@@ -1913,7 +1913,7 @@
                 <a:ea typeface="Arial" pitchFamily="34" charset="-122"/>
                 <a:cs typeface="Arial" pitchFamily="34" charset="-120"/>
               </a:rPr>
-              <a:t>₹1,935 Cr</a:t>
+              <a:t>₹1,776 Cr</a:t>
             </a:r>
             <a:endParaRPr lang="en-US" sz="4400" dirty="0"/>
           </a:p>
@@ -1952,7 +1952,7 @@
                 <a:ea typeface="Calibri" pitchFamily="34" charset="-122"/>
                 <a:cs typeface="Calibri" pitchFamily="34" charset="-120"/>
               </a:rPr>
-              <a:t>lost to digital arrest scams in 2024 alone (I4C)</a:t>
+              <a:t>stolen via digital arrest scams in Jan–Sep 2024 alone (MHA)</a:t>
             </a:r>
             <a:endParaRPr lang="en-US" sz="1350" dirty="0"/>
           </a:p>
@@ -2018,7 +2018,7 @@
                 <a:ea typeface="Arial" pitchFamily="34" charset="-122"/>
                 <a:cs typeface="Arial" pitchFamily="34" charset="-120"/>
               </a:rPr>
-              <a:t>92,334</a:t>
+              <a:t>1.14 M</a:t>
             </a:r>
             <a:endParaRPr lang="en-US" sz="4400" dirty="0"/>
           </a:p>
@@ -2057,7 +2057,7 @@
                 <a:ea typeface="Calibri" pitchFamily="34" charset="-122"/>
                 <a:cs typeface="Calibri" pitchFamily="34" charset="-120"/>
               </a:rPr>
-              <a:t>digital arrest complaints — seniors targeted on hours-long video calls</a:t>
+              <a:t>cybercrime complaints in 2023, up 60% YoY — seniors targeted most</a:t>
             </a:r>
             <a:endParaRPr lang="en-US" sz="1350" dirty="0"/>
           </a:p>
@@ -3799,7 +3799,7 @@
               <a:buNone/>
             </a:pPr>
             <a:r>
-              <a:rPr lang="en-US" sz="1400" dirty="0">
+              <a:rPr lang="en-US" sz="1350" dirty="0">
                 <a:solidFill>
                   <a:srgbClr val="22D3EE"/>
                 </a:solidFill>
@@ -3807,9 +3807,9 @@
                 <a:ea typeface="Calibri" pitchFamily="34" charset="-122"/>
                 <a:cs typeface="Calibri" pitchFamily="34" charset="-120"/>
               </a:rPr>
-              <a:t>+ National Command Centre: live geospatial threat map (scam-origin zones, FICN corridors) with a fused real-time intelligence feed</a:t>
-            </a:r>
-            <a:endParaRPr lang="en-US" sz="1400" dirty="0"/>
+              <a:t>+ Command Centre threat map · Live Intercept real-time fusion demo (AI-voice + deepfake detection) · Citizen Shield chat in English &amp; Hindi — all live in the prototype</a:t>
+            </a:r>
+            <a:endParaRPr lang="en-US" sz="1350" dirty="0"/>
           </a:p>
         </p:txBody>
       </p:sp>
@@ -4436,7 +4436,7 @@
                 <a:ea typeface="Calibri" pitchFamily="34" charset="-122"/>
                 <a:cs typeface="Calibri" pitchFamily="34" charset="-120"/>
               </a:rPr>
-              <a:t>Roadmap reach</a:t>
+              <a:t>Live in the prototype</a:t>
             </a:r>
             <a:endParaRPr lang="en-US" sz="1400" dirty="0"/>
           </a:p>
@@ -4465,12 +4465,12 @@
           <a:p>
             <a:pPr indent="0" marL="0">
               <a:lnSpc>
-                <a:spcPts val="1900"/>
+                <a:spcPts val="1700"/>
               </a:lnSpc>
               <a:buNone/>
             </a:pPr>
             <a:r>
-              <a:rPr lang="en-US" sz="1250" dirty="0">
+              <a:rPr lang="en-US" sz="1200" dirty="0">
                 <a:solidFill>
                   <a:srgbClr val="DBE6F7"/>
                 </a:solidFill>
@@ -4478,9 +4478,9 @@
                 <a:ea typeface="Calibri" pitchFamily="34" charset="-122"/>
                 <a:cs typeface="Calibri" pitchFamily="34" charset="-120"/>
               </a:rPr>
-              <a:t>Citizen Shield on WhatsApp &amp; IVR in 12 regional languages · guided reporting to the 1930 helpline · on-device speech-to-text so audio never leaves the phone</a:t>
-            </a:r>
-            <a:endParaRPr lang="en-US" sz="1250" dirty="0"/>
+              <a:t>Live Intercept: full fusion pipeline on a streaming call — AI-voice detection, deepfake analysis, spoof tracing — triggering mid-call intervention. Citizen Shield chat shipping in English &amp; Hindi (12-language roadmap, WhatsApp/IVR).</a:t>
+            </a:r>
+            <a:endParaRPr lang="en-US" sz="1200" dirty="0"/>
           </a:p>
         </p:txBody>
       </p:sp>

--- a/docs/PRAHARI_Pitch_Deck.pptx
+++ b/docs/PRAHARI_Pitch_Deck.pptx
@@ -3807,7 +3807,7 @@
                 <a:ea typeface="Calibri" pitchFamily="34" charset="-122"/>
                 <a:cs typeface="Calibri" pitchFamily="34" charset="-120"/>
               </a:rPr>
-              <a:t>+ Command Centre threat map · Live Intercept real-time fusion demo (AI-voice + deepfake detection) · Citizen Shield chat in English &amp; Hindi — all live in the prototype</a:t>
+              <a:t>+ Command Centre threat map · Live Intercept plays REAL FTC scam recordings &amp; neural-TTS calls, intercepted live · Citizen Shield chat in English &amp; Hindi</a:t>
             </a:r>
             <a:endParaRPr lang="en-US" sz="1350" dirty="0"/>
           </a:p>
@@ -4436,7 +4436,7 @@
                 <a:ea typeface="Calibri" pitchFamily="34" charset="-122"/>
                 <a:cs typeface="Calibri" pitchFamily="34" charset="-120"/>
               </a:rPr>
-              <a:t>Live in the prototype</a:t>
+              <a:t>Real, not staged</a:t>
             </a:r>
             <a:endParaRPr lang="en-US" sz="1400" dirty="0"/>
           </a:p>
@@ -4478,7 +4478,7 @@
                 <a:ea typeface="Calibri" pitchFamily="34" charset="-122"/>
                 <a:cs typeface="Calibri" pitchFamily="34" charset="-120"/>
               </a:rPr>
-              <a:t>Live Intercept: full fusion pipeline on a streaming call — AI-voice detection, deepfake analysis, spoof tracing — triggering mid-call intervention. Citizen Shield chat shipping in English &amp; Hindi (12-language roadmap, WhatsApp/IVR).</a:t>
+              <a:t>A REAL scam robocall (FTC evidence, Whisper-transcribed) is intercepted mid-sentence with no hand-tuned trigger. Live Mic classifies the presenter's own voice via real speech-to-text. FICN model: 5/5 on held-out real note photos.</a:t>
             </a:r>
             <a:endParaRPr lang="en-US" sz="1200" dirty="0"/>
           </a:p>

--- a/docs/PRAHARI_Pitch_Deck.pptx
+++ b/docs/PRAHARI_Pitch_Deck.pptx
@@ -14,9 +14,11 @@
     <p:sldId id="262" r:id="rId8"/>
     <p:sldId id="263" r:id="rId9"/>
     <p:sldId id="264" r:id="rId10"/>
+    <p:sldId id="265" r:id="rId11"/>
+    <p:sldId id="266" r:id="rId12"/>
   </p:sldIdLst>
   <p:notesMasterIdLst>
-    <p:notesMasterId r:id="rId11"/>
+    <p:notesMasterId r:id="rId13"/>
   </p:notesMasterIdLst>
   <p:sldSz cx="12188952" cy="6858000"/>
   <p:notesSz cx="6858000" cy="12188952"/>
@@ -534,6 +536,182 @@
             <a:fld id="{F7021451-1387-4CA6-816F-3879F97B5CBC}" type="slidenum">
               <a:rPr lang="en-US"/>
               <a:t>1</a:t>
+            </a:fld>
+            <a:endParaRPr lang="en-US"/>
+          </a:p>
+        </p:txBody>
+      </p:sp>
+    </p:spTree>
+    <p:extLst>
+      <p:ext uri="{BB962C8B-B14F-4D97-AF65-F5344CB8AC3E}">
+        <p14:creationId xmlns:p14="http://schemas.microsoft.com/office/powerpoint/2010/main" val="1024086991"/>
+      </p:ext>
+    </p:extLst>
+  </p:cSld>
+  <p:clrMapOvr>
+    <a:masterClrMapping/>
+  </p:clrMapOvr>
+</p:notes>
+</file>
+
+<file path=ppt/notesSlides/notesSlide10.xml><?xml version="1.0" encoding="utf-8"?>
+<p:notes xmlns:a="http://schemas.openxmlformats.org/drawingml/2006/main" xmlns:r="http://schemas.openxmlformats.org/officeDocument/2006/relationships" xmlns:p="http://schemas.openxmlformats.org/presentationml/2006/main">
+  <p:cSld>
+    <p:spTree>
+      <p:nvGrpSpPr>
+        <p:cNvPr id="1" name=""/>
+        <p:cNvGrpSpPr/>
+        <p:nvPr/>
+      </p:nvGrpSpPr>
+      <p:grpSpPr>
+        <a:xfrm>
+          <a:off x="0" y="0"/>
+          <a:ext cx="0" cy="0"/>
+          <a:chOff x="0" y="0"/>
+          <a:chExt cx="0" cy="0"/>
+        </a:xfrm>
+      </p:grpSpPr>
+      <p:sp>
+        <p:nvSpPr>
+          <p:cNvPr id="2" name="Slide Image Placeholder 1"/>
+          <p:cNvSpPr>
+            <a:spLocks noGrp="1" noRot="1" noChangeAspect="1"/>
+          </p:cNvSpPr>
+          <p:nvPr>
+            <p:ph type="sldImg"/>
+          </p:nvPr>
+        </p:nvSpPr>
+        <p:spPr/>
+      </p:sp>
+      <p:sp>
+        <p:nvSpPr>
+          <p:cNvPr id="3" name="Notes Placeholder 2"/>
+          <p:cNvSpPr>
+            <a:spLocks noGrp="1"/>
+          </p:cNvSpPr>
+          <p:nvPr>
+            <p:ph type="body" idx="1"/>
+          </p:nvPr>
+        </p:nvSpPr>
+        <p:spPr/>
+        <p:txBody>
+          <a:bodyPr/>
+          <a:lstStyle/>
+          <a:p>
+            <a:r>
+              <a:rPr lang="en-US" dirty="0"/>
+              <a:t/>
+            </a:r>
+            <a:endParaRPr lang="en-US" dirty="0"/>
+          </a:p>
+        </p:txBody>
+      </p:sp>
+      <p:sp>
+        <p:nvSpPr>
+          <p:cNvPr id="4" name="Slide Number Placeholder 3"/>
+          <p:cNvSpPr>
+            <a:spLocks noGrp="1"/>
+          </p:cNvSpPr>
+          <p:nvPr>
+            <p:ph type="sldNum" sz="quarter" idx="10"/>
+          </p:nvPr>
+        </p:nvSpPr>
+        <p:spPr/>
+        <p:txBody>
+          <a:bodyPr/>
+          <a:lstStyle/>
+          <a:p>
+            <a:fld id="{F7021451-1387-4CA6-816F-3879F97B5CBC}" type="slidenum">
+              <a:rPr lang="en-US"/>
+              <a:t>10</a:t>
+            </a:fld>
+            <a:endParaRPr lang="en-US"/>
+          </a:p>
+        </p:txBody>
+      </p:sp>
+    </p:spTree>
+    <p:extLst>
+      <p:ext uri="{BB962C8B-B14F-4D97-AF65-F5344CB8AC3E}">
+        <p14:creationId xmlns:p14="http://schemas.microsoft.com/office/powerpoint/2010/main" val="1024086991"/>
+      </p:ext>
+    </p:extLst>
+  </p:cSld>
+  <p:clrMapOvr>
+    <a:masterClrMapping/>
+  </p:clrMapOvr>
+</p:notes>
+</file>
+
+<file path=ppt/notesSlides/notesSlide11.xml><?xml version="1.0" encoding="utf-8"?>
+<p:notes xmlns:a="http://schemas.openxmlformats.org/drawingml/2006/main" xmlns:r="http://schemas.openxmlformats.org/officeDocument/2006/relationships" xmlns:p="http://schemas.openxmlformats.org/presentationml/2006/main">
+  <p:cSld>
+    <p:spTree>
+      <p:nvGrpSpPr>
+        <p:cNvPr id="1" name=""/>
+        <p:cNvGrpSpPr/>
+        <p:nvPr/>
+      </p:nvGrpSpPr>
+      <p:grpSpPr>
+        <a:xfrm>
+          <a:off x="0" y="0"/>
+          <a:ext cx="0" cy="0"/>
+          <a:chOff x="0" y="0"/>
+          <a:chExt cx="0" cy="0"/>
+        </a:xfrm>
+      </p:grpSpPr>
+      <p:sp>
+        <p:nvSpPr>
+          <p:cNvPr id="2" name="Slide Image Placeholder 1"/>
+          <p:cNvSpPr>
+            <a:spLocks noGrp="1" noRot="1" noChangeAspect="1"/>
+          </p:cNvSpPr>
+          <p:nvPr>
+            <p:ph type="sldImg"/>
+          </p:nvPr>
+        </p:nvSpPr>
+        <p:spPr/>
+      </p:sp>
+      <p:sp>
+        <p:nvSpPr>
+          <p:cNvPr id="3" name="Notes Placeholder 2"/>
+          <p:cNvSpPr>
+            <a:spLocks noGrp="1"/>
+          </p:cNvSpPr>
+          <p:nvPr>
+            <p:ph type="body" idx="1"/>
+          </p:nvPr>
+        </p:nvSpPr>
+        <p:spPr/>
+        <p:txBody>
+          <a:bodyPr/>
+          <a:lstStyle/>
+          <a:p>
+            <a:r>
+              <a:rPr lang="en-US" dirty="0"/>
+              <a:t/>
+            </a:r>
+            <a:endParaRPr lang="en-US" dirty="0"/>
+          </a:p>
+        </p:txBody>
+      </p:sp>
+      <p:sp>
+        <p:nvSpPr>
+          <p:cNvPr id="4" name="Slide Number Placeholder 3"/>
+          <p:cNvSpPr>
+            <a:spLocks noGrp="1"/>
+          </p:cNvSpPr>
+          <p:nvPr>
+            <p:ph type="sldNum" sz="quarter" idx="10"/>
+          </p:nvPr>
+        </p:nvSpPr>
+        <p:spPr/>
+        <p:txBody>
+          <a:bodyPr/>
+          <a:lstStyle/>
+          <a:p>
+            <a:fld id="{F7021451-1387-4CA6-816F-3879F97B5CBC}" type="slidenum">
+              <a:rPr lang="en-US"/>
+              <a:t>11</a:t>
             </a:fld>
             <a:endParaRPr lang="en-US"/>
           </a:p>
@@ -1782,6 +1960,1353 @@
           </a:p>
         </p:txBody>
       </p:sp>
+      <p:sp>
+        <p:nvSpPr>
+          <p:cNvPr id="7" name="Text 5"/>
+          <p:cNvSpPr/>
+          <p:nvPr/>
+        </p:nvSpPr>
+        <p:spPr>
+          <a:xfrm>
+            <a:off x="1371600" y="5943600"/>
+            <a:ext cx="9445752" cy="365760"/>
+          </a:xfrm>
+          <a:prstGeom prst="rect">
+            <a:avLst/>
+          </a:prstGeom>
+          <a:noFill/>
+          <a:ln/>
+        </p:spPr>
+        <p:txBody>
+          <a:bodyPr wrap="square" rtlCol="0" anchor="ctr"/>
+          <a:lstStyle/>
+          <a:p>
+            <a:pPr algn="ctr" indent="0" marL="0">
+              <a:buNone/>
+            </a:pPr>
+            <a:r>
+              <a:rPr lang="en-US" sz="1400" b="1" dirty="0">
+                <a:solidFill>
+                  <a:srgbClr val="34D399"/>
+                </a:solidFill>
+                <a:latin typeface="Calibri" pitchFamily="34" charset="0"/>
+                <a:ea typeface="Calibri" pitchFamily="34" charset="-122"/>
+                <a:cs typeface="Calibri" pitchFamily="34" charset="-120"/>
+              </a:rPr>
+              <a:t>LIVE — try it now: sanskar9999.github.io/prahari  ·  github.com/sanskar9999/prahari</a:t>
+            </a:r>
+            <a:endParaRPr lang="en-US" sz="1400" dirty="0"/>
+          </a:p>
+        </p:txBody>
+      </p:sp>
+    </p:spTree>
+  </p:cSld>
+  <p:clrMapOvr>
+    <a:masterClrMapping/>
+  </p:clrMapOvr>
+</p:sld>
+</file>
+
+<file path=ppt/slides/slide10.xml><?xml version="1.0" encoding="utf-8"?>
+<p:sld xmlns:a="http://schemas.openxmlformats.org/drawingml/2006/main" xmlns:r="http://schemas.openxmlformats.org/officeDocument/2006/relationships" xmlns:p="http://schemas.openxmlformats.org/presentationml/2006/main">
+  <p:cSld name="Slide 10">
+    <p:bg>
+      <p:bgPr>
+        <a:solidFill>
+          <a:srgbClr val="0C1220"/>
+        </a:solidFill>
+      </p:bgPr>
+    </p:bg>
+    <p:spTree>
+      <p:nvGrpSpPr>
+        <p:cNvPr id="1" name=""/>
+        <p:cNvGrpSpPr/>
+        <p:nvPr/>
+      </p:nvGrpSpPr>
+      <p:grpSpPr>
+        <a:xfrm>
+          <a:off x="0" y="0"/>
+          <a:ext cx="0" cy="0"/>
+          <a:chOff x="0" y="0"/>
+          <a:chExt cx="0" cy="0"/>
+        </a:xfrm>
+      </p:grpSpPr>
+      <p:sp>
+        <p:nvSpPr>
+          <p:cNvPr id="2" name="Text 0"/>
+          <p:cNvSpPr/>
+          <p:nvPr/>
+        </p:nvSpPr>
+        <p:spPr>
+          <a:xfrm>
+            <a:off x="457200" y="411480"/>
+            <a:ext cx="11247120" cy="731520"/>
+          </a:xfrm>
+          <a:prstGeom prst="rect">
+            <a:avLst/>
+          </a:prstGeom>
+          <a:noFill/>
+          <a:ln/>
+        </p:spPr>
+        <p:txBody>
+          <a:bodyPr wrap="square" rtlCol="0" anchor="ctr"/>
+          <a:lstStyle/>
+          <a:p>
+            <a:pPr indent="0" marL="0">
+              <a:buNone/>
+            </a:pPr>
+            <a:r>
+              <a:rPr lang="en-US" sz="3800" b="1" dirty="0">
+                <a:solidFill>
+                  <a:srgbClr val="FFFFFF"/>
+                </a:solidFill>
+                <a:latin typeface="Arial" pitchFamily="34" charset="0"/>
+                <a:ea typeface="Arial" pitchFamily="34" charset="-122"/>
+                <a:cs typeface="Arial" pitchFamily="34" charset="-120"/>
+              </a:rPr>
+              <a:t>Built against the judging criteria</a:t>
+            </a:r>
+            <a:endParaRPr lang="en-US" sz="3800" dirty="0"/>
+          </a:p>
+        </p:txBody>
+      </p:sp>
+      <p:sp>
+        <p:nvSpPr>
+          <p:cNvPr id="3" name="Shape 1"/>
+          <p:cNvSpPr/>
+          <p:nvPr/>
+        </p:nvSpPr>
+        <p:spPr>
+          <a:xfrm>
+            <a:off x="548640" y="1463040"/>
+            <a:ext cx="4206240" cy="804672"/>
+          </a:xfrm>
+          <a:prstGeom prst="roundRect">
+            <a:avLst>
+              <a:gd name="adj" fmla="val 9091"/>
+            </a:avLst>
+          </a:prstGeom>
+          <a:solidFill>
+            <a:srgbClr val="141F38"/>
+          </a:solidFill>
+          <a:ln w="9525">
+            <a:solidFill>
+              <a:srgbClr val="24365C"/>
+            </a:solidFill>
+            <a:prstDash val="solid"/>
+          </a:ln>
+        </p:spPr>
+      </p:sp>
+      <p:sp>
+        <p:nvSpPr>
+          <p:cNvPr id="4" name="Shape 2"/>
+          <p:cNvSpPr/>
+          <p:nvPr/>
+        </p:nvSpPr>
+        <p:spPr>
+          <a:xfrm>
+            <a:off x="4892040" y="1463040"/>
+            <a:ext cx="6720840" cy="804672"/>
+          </a:xfrm>
+          <a:prstGeom prst="roundRect">
+            <a:avLst>
+              <a:gd name="adj" fmla="val 9091"/>
+            </a:avLst>
+          </a:prstGeom>
+          <a:solidFill>
+            <a:srgbClr val="10182B"/>
+          </a:solidFill>
+          <a:ln w="9525">
+            <a:solidFill>
+              <a:srgbClr val="24365C"/>
+            </a:solidFill>
+            <a:prstDash val="solid"/>
+          </a:ln>
+        </p:spPr>
+      </p:sp>
+      <p:sp>
+        <p:nvSpPr>
+          <p:cNvPr id="5" name="Text 3"/>
+          <p:cNvSpPr/>
+          <p:nvPr/>
+        </p:nvSpPr>
+        <p:spPr>
+          <a:xfrm>
+            <a:off x="777240" y="1517904"/>
+            <a:ext cx="3749040" cy="694944"/>
+          </a:xfrm>
+          <a:prstGeom prst="rect">
+            <a:avLst/>
+          </a:prstGeom>
+          <a:noFill/>
+          <a:ln/>
+        </p:spPr>
+        <p:txBody>
+          <a:bodyPr wrap="square" rtlCol="0" anchor="ctr"/>
+          <a:lstStyle/>
+          <a:p>
+            <a:pPr indent="0" marL="0">
+              <a:buNone/>
+            </a:pPr>
+            <a:r>
+              <a:rPr lang="en-US" sz="1350" b="1" dirty="0">
+                <a:solidFill>
+                  <a:srgbClr val="22D3EE"/>
+                </a:solidFill>
+                <a:latin typeface="Calibri" pitchFamily="34" charset="0"/>
+                <a:ea typeface="Calibri" pitchFamily="34" charset="-122"/>
+                <a:cs typeface="Calibri" pitchFamily="34" charset="-120"/>
+              </a:rPr>
+              <a:t>Scam detection precision &amp; recall</a:t>
+            </a:r>
+            <a:endParaRPr lang="en-US" sz="1350" dirty="0"/>
+          </a:p>
+        </p:txBody>
+      </p:sp>
+      <p:sp>
+        <p:nvSpPr>
+          <p:cNvPr id="6" name="Text 4"/>
+          <p:cNvSpPr/>
+          <p:nvPr/>
+        </p:nvSpPr>
+        <p:spPr>
+          <a:xfrm>
+            <a:off x="5120640" y="1517904"/>
+            <a:ext cx="6309360" cy="694944"/>
+          </a:xfrm>
+          <a:prstGeom prst="rect">
+            <a:avLst/>
+          </a:prstGeom>
+          <a:noFill/>
+          <a:ln/>
+        </p:spPr>
+        <p:txBody>
+          <a:bodyPr wrap="square" rtlCol="0" anchor="ctr"/>
+          <a:lstStyle/>
+          <a:p>
+            <a:pPr indent="0" marL="0">
+              <a:buNone/>
+            </a:pPr>
+            <a:r>
+              <a:rPr lang="en-US" sz="1250" dirty="0">
+                <a:solidFill>
+                  <a:srgbClr val="DBE6F7"/>
+                </a:solidFill>
+                <a:latin typeface="Calibri" pitchFamily="34" charset="0"/>
+                <a:ea typeface="Calibri" pitchFamily="34" charset="-122"/>
+                <a:cs typeface="Calibri" pitchFamily="34" charset="-120"/>
+              </a:rPr>
+              <a:t>Weighted 5-category fusion — no single keyword triggers an alarm; benign bank call demoed as negative control</a:t>
+            </a:r>
+            <a:endParaRPr lang="en-US" sz="1250" dirty="0"/>
+          </a:p>
+        </p:txBody>
+      </p:sp>
+      <p:sp>
+        <p:nvSpPr>
+          <p:cNvPr id="7" name="Shape 5"/>
+          <p:cNvSpPr/>
+          <p:nvPr/>
+        </p:nvSpPr>
+        <p:spPr>
+          <a:xfrm>
+            <a:off x="548640" y="2395728"/>
+            <a:ext cx="4206240" cy="804672"/>
+          </a:xfrm>
+          <a:prstGeom prst="roundRect">
+            <a:avLst>
+              <a:gd name="adj" fmla="val 9091"/>
+            </a:avLst>
+          </a:prstGeom>
+          <a:solidFill>
+            <a:srgbClr val="141F38"/>
+          </a:solidFill>
+          <a:ln w="9525">
+            <a:solidFill>
+              <a:srgbClr val="24365C"/>
+            </a:solidFill>
+            <a:prstDash val="solid"/>
+          </a:ln>
+        </p:spPr>
+      </p:sp>
+      <p:sp>
+        <p:nvSpPr>
+          <p:cNvPr id="8" name="Shape 6"/>
+          <p:cNvSpPr/>
+          <p:nvPr/>
+        </p:nvSpPr>
+        <p:spPr>
+          <a:xfrm>
+            <a:off x="4892040" y="2395728"/>
+            <a:ext cx="6720840" cy="804672"/>
+          </a:xfrm>
+          <a:prstGeom prst="roundRect">
+            <a:avLst>
+              <a:gd name="adj" fmla="val 9091"/>
+            </a:avLst>
+          </a:prstGeom>
+          <a:solidFill>
+            <a:srgbClr val="10182B"/>
+          </a:solidFill>
+          <a:ln w="9525">
+            <a:solidFill>
+              <a:srgbClr val="24365C"/>
+            </a:solidFill>
+            <a:prstDash val="solid"/>
+          </a:ln>
+        </p:spPr>
+      </p:sp>
+      <p:sp>
+        <p:nvSpPr>
+          <p:cNvPr id="9" name="Text 7"/>
+          <p:cNvSpPr/>
+          <p:nvPr/>
+        </p:nvSpPr>
+        <p:spPr>
+          <a:xfrm>
+            <a:off x="777240" y="2450592"/>
+            <a:ext cx="3749040" cy="694944"/>
+          </a:xfrm>
+          <a:prstGeom prst="rect">
+            <a:avLst/>
+          </a:prstGeom>
+          <a:noFill/>
+          <a:ln/>
+        </p:spPr>
+        <p:txBody>
+          <a:bodyPr wrap="square" rtlCol="0" anchor="ctr"/>
+          <a:lstStyle/>
+          <a:p>
+            <a:pPr indent="0" marL="0">
+              <a:buNone/>
+            </a:pPr>
+            <a:r>
+              <a:rPr lang="en-US" sz="1350" b="1" dirty="0">
+                <a:solidFill>
+                  <a:srgbClr val="22D3EE"/>
+                </a:solidFill>
+                <a:latin typeface="Calibri" pitchFamily="34" charset="0"/>
+                <a:ea typeface="Calibri" pitchFamily="34" charset="-122"/>
+                <a:cs typeface="Calibri" pitchFamily="34" charset="-120"/>
+              </a:rPr>
+              <a:t>Counterfeit detection across print quality</a:t>
+            </a:r>
+            <a:endParaRPr lang="en-US" sz="1350" dirty="0"/>
+          </a:p>
+        </p:txBody>
+      </p:sp>
+      <p:sp>
+        <p:nvSpPr>
+          <p:cNvPr id="10" name="Text 8"/>
+          <p:cNvSpPr/>
+          <p:nvPr/>
+        </p:nvSpPr>
+        <p:spPr>
+          <a:xfrm>
+            <a:off x="5120640" y="2450592"/>
+            <a:ext cx="6309360" cy="694944"/>
+          </a:xfrm>
+          <a:prstGeom prst="rect">
+            <a:avLst/>
+          </a:prstGeom>
+          <a:noFill/>
+          <a:ln/>
+        </p:spPr>
+        <p:txBody>
+          <a:bodyPr wrap="square" rtlCol="0" anchor="ctr"/>
+          <a:lstStyle/>
+          <a:p>
+            <a:pPr indent="0" marL="0">
+              <a:buNone/>
+            </a:pPr>
+            <a:r>
+              <a:rPr lang="en-US" sz="1250" dirty="0">
+                <a:solidFill>
+                  <a:srgbClr val="DBE6F7"/>
+                </a:solidFill>
+                <a:latin typeface="Calibri" pitchFamily="34" charset="0"/>
+                <a:ea typeface="Calibri" pitchFamily="34" charset="-122"/>
+                <a:cs typeface="Calibri" pitchFamily="34" charset="-120"/>
+              </a:rPr>
+              <a:t>Per-feature confidence scoring + serial-pattern validation catches even high-quality reprints of seized series</a:t>
+            </a:r>
+            <a:endParaRPr lang="en-US" sz="1250" dirty="0"/>
+          </a:p>
+        </p:txBody>
+      </p:sp>
+      <p:sp>
+        <p:nvSpPr>
+          <p:cNvPr id="11" name="Shape 9"/>
+          <p:cNvSpPr/>
+          <p:nvPr/>
+        </p:nvSpPr>
+        <p:spPr>
+          <a:xfrm>
+            <a:off x="548640" y="3328416"/>
+            <a:ext cx="4206240" cy="804672"/>
+          </a:xfrm>
+          <a:prstGeom prst="roundRect">
+            <a:avLst>
+              <a:gd name="adj" fmla="val 9091"/>
+            </a:avLst>
+          </a:prstGeom>
+          <a:solidFill>
+            <a:srgbClr val="141F38"/>
+          </a:solidFill>
+          <a:ln w="9525">
+            <a:solidFill>
+              <a:srgbClr val="24365C"/>
+            </a:solidFill>
+            <a:prstDash val="solid"/>
+          </a:ln>
+        </p:spPr>
+      </p:sp>
+      <p:sp>
+        <p:nvSpPr>
+          <p:cNvPr id="12" name="Shape 10"/>
+          <p:cNvSpPr/>
+          <p:nvPr/>
+        </p:nvSpPr>
+        <p:spPr>
+          <a:xfrm>
+            <a:off x="4892040" y="3328416"/>
+            <a:ext cx="6720840" cy="804672"/>
+          </a:xfrm>
+          <a:prstGeom prst="roundRect">
+            <a:avLst>
+              <a:gd name="adj" fmla="val 9091"/>
+            </a:avLst>
+          </a:prstGeom>
+          <a:solidFill>
+            <a:srgbClr val="10182B"/>
+          </a:solidFill>
+          <a:ln w="9525">
+            <a:solidFill>
+              <a:srgbClr val="24365C"/>
+            </a:solidFill>
+            <a:prstDash val="solid"/>
+          </a:ln>
+        </p:spPr>
+      </p:sp>
+      <p:sp>
+        <p:nvSpPr>
+          <p:cNvPr id="13" name="Text 11"/>
+          <p:cNvSpPr/>
+          <p:nvPr/>
+        </p:nvSpPr>
+        <p:spPr>
+          <a:xfrm>
+            <a:off x="777240" y="3383280"/>
+            <a:ext cx="3749040" cy="694944"/>
+          </a:xfrm>
+          <a:prstGeom prst="rect">
+            <a:avLst/>
+          </a:prstGeom>
+          <a:noFill/>
+          <a:ln/>
+        </p:spPr>
+        <p:txBody>
+          <a:bodyPr wrap="square" rtlCol="0" anchor="ctr"/>
+          <a:lstStyle/>
+          <a:p>
+            <a:pPr indent="0" marL="0">
+              <a:buNone/>
+            </a:pPr>
+            <a:r>
+              <a:rPr lang="en-US" sz="1350" b="1" dirty="0">
+                <a:solidFill>
+                  <a:srgbClr val="22D3EE"/>
+                </a:solidFill>
+                <a:latin typeface="Calibri" pitchFamily="34" charset="0"/>
+                <a:ea typeface="Calibri" pitchFamily="34" charset="-122"/>
+                <a:cs typeface="Calibri" pitchFamily="34" charset="-120"/>
+              </a:rPr>
+              <a:t>Lead time before mass victimisation</a:t>
+            </a:r>
+            <a:endParaRPr lang="en-US" sz="1350" dirty="0"/>
+          </a:p>
+        </p:txBody>
+      </p:sp>
+      <p:sp>
+        <p:nvSpPr>
+          <p:cNvPr id="14" name="Text 12"/>
+          <p:cNvSpPr/>
+          <p:nvPr/>
+        </p:nvSpPr>
+        <p:spPr>
+          <a:xfrm>
+            <a:off x="5120640" y="3383280"/>
+            <a:ext cx="6309360" cy="694944"/>
+          </a:xfrm>
+          <a:prstGeom prst="rect">
+            <a:avLst/>
+          </a:prstGeom>
+          <a:noFill/>
+          <a:ln/>
+        </p:spPr>
+        <p:txBody>
+          <a:bodyPr wrap="square" rtlCol="0" anchor="ctr"/>
+          <a:lstStyle/>
+          <a:p>
+            <a:pPr indent="0" marL="0">
+              <a:buNone/>
+            </a:pPr>
+            <a:r>
+              <a:rPr lang="en-US" sz="1250" dirty="0">
+                <a:solidFill>
+                  <a:srgbClr val="DBE6F7"/>
+                </a:solidFill>
+                <a:latin typeface="Calibri" pitchFamily="34" charset="0"/>
+                <a:ea typeface="Calibri" pitchFamily="34" charset="-122"/>
+                <a:cs typeface="Calibri" pitchFamily="34" charset="-120"/>
+              </a:rPr>
+              <a:t>Campaign confirmed at T+31 hours after first report — while mule accounts still hold funds</a:t>
+            </a:r>
+            <a:endParaRPr lang="en-US" sz="1250" dirty="0"/>
+          </a:p>
+        </p:txBody>
+      </p:sp>
+      <p:sp>
+        <p:nvSpPr>
+          <p:cNvPr id="15" name="Shape 13"/>
+          <p:cNvSpPr/>
+          <p:nvPr/>
+        </p:nvSpPr>
+        <p:spPr>
+          <a:xfrm>
+            <a:off x="548640" y="4261104"/>
+            <a:ext cx="4206240" cy="804672"/>
+          </a:xfrm>
+          <a:prstGeom prst="roundRect">
+            <a:avLst>
+              <a:gd name="adj" fmla="val 9091"/>
+            </a:avLst>
+          </a:prstGeom>
+          <a:solidFill>
+            <a:srgbClr val="141F38"/>
+          </a:solidFill>
+          <a:ln w="9525">
+            <a:solidFill>
+              <a:srgbClr val="24365C"/>
+            </a:solidFill>
+            <a:prstDash val="solid"/>
+          </a:ln>
+        </p:spPr>
+      </p:sp>
+      <p:sp>
+        <p:nvSpPr>
+          <p:cNvPr id="16" name="Shape 14"/>
+          <p:cNvSpPr/>
+          <p:nvPr/>
+        </p:nvSpPr>
+        <p:spPr>
+          <a:xfrm>
+            <a:off x="4892040" y="4261104"/>
+            <a:ext cx="6720840" cy="804672"/>
+          </a:xfrm>
+          <a:prstGeom prst="roundRect">
+            <a:avLst>
+              <a:gd name="adj" fmla="val 9091"/>
+            </a:avLst>
+          </a:prstGeom>
+          <a:solidFill>
+            <a:srgbClr val="10182B"/>
+          </a:solidFill>
+          <a:ln w="9525">
+            <a:solidFill>
+              <a:srgbClr val="24365C"/>
+            </a:solidFill>
+            <a:prstDash val="solid"/>
+          </a:ln>
+        </p:spPr>
+      </p:sp>
+      <p:sp>
+        <p:nvSpPr>
+          <p:cNvPr id="17" name="Text 15"/>
+          <p:cNvSpPr/>
+          <p:nvPr/>
+        </p:nvSpPr>
+        <p:spPr>
+          <a:xfrm>
+            <a:off x="777240" y="4315968"/>
+            <a:ext cx="3749040" cy="694944"/>
+          </a:xfrm>
+          <a:prstGeom prst="rect">
+            <a:avLst/>
+          </a:prstGeom>
+          <a:noFill/>
+          <a:ln/>
+        </p:spPr>
+        <p:txBody>
+          <a:bodyPr wrap="square" rtlCol="0" anchor="ctr"/>
+          <a:lstStyle/>
+          <a:p>
+            <a:pPr indent="0" marL="0">
+              <a:buNone/>
+            </a:pPr>
+            <a:r>
+              <a:rPr lang="en-US" sz="1350" b="1" dirty="0">
+                <a:solidFill>
+                  <a:srgbClr val="22D3EE"/>
+                </a:solidFill>
+                <a:latin typeface="Calibri" pitchFamily="34" charset="0"/>
+                <a:ea typeface="Calibri" pitchFamily="34" charset="-122"/>
+                <a:cs typeface="Calibri" pitchFamily="34" charset="-120"/>
+              </a:rPr>
+              <a:t>Very low citizen-facing false positives</a:t>
+            </a:r>
+            <a:endParaRPr lang="en-US" sz="1350" dirty="0"/>
+          </a:p>
+        </p:txBody>
+      </p:sp>
+      <p:sp>
+        <p:nvSpPr>
+          <p:cNvPr id="18" name="Text 16"/>
+          <p:cNvSpPr/>
+          <p:nvPr/>
+        </p:nvSpPr>
+        <p:spPr>
+          <a:xfrm>
+            <a:off x="5120640" y="4315968"/>
+            <a:ext cx="6309360" cy="694944"/>
+          </a:xfrm>
+          <a:prstGeom prst="rect">
+            <a:avLst/>
+          </a:prstGeom>
+          <a:noFill/>
+          <a:ln/>
+        </p:spPr>
+        <p:txBody>
+          <a:bodyPr wrap="square" rtlCol="0" anchor="ctr"/>
+          <a:lstStyle/>
+          <a:p>
+            <a:pPr indent="0" marL="0">
+              <a:buNone/>
+            </a:pPr>
+            <a:r>
+              <a:rPr lang="en-US" sz="1250" dirty="0">
+                <a:solidFill>
+                  <a:srgbClr val="DBE6F7"/>
+                </a:solidFill>
+                <a:latin typeface="Calibri" pitchFamily="34" charset="0"/>
+                <a:ea typeface="Calibri" pitchFamily="34" charset="-122"/>
+                <a:cs typeface="Calibri" pitchFamily="34" charset="-120"/>
+              </a:rPr>
+              <a:t>Explainable, phrase-level verdicts; saturating category scores; tiered verdicts instead of binary alarms</a:t>
+            </a:r>
+            <a:endParaRPr lang="en-US" sz="1250" dirty="0"/>
+          </a:p>
+        </p:txBody>
+      </p:sp>
+      <p:sp>
+        <p:nvSpPr>
+          <p:cNvPr id="19" name="Shape 17"/>
+          <p:cNvSpPr/>
+          <p:nvPr/>
+        </p:nvSpPr>
+        <p:spPr>
+          <a:xfrm>
+            <a:off x="548640" y="5193792"/>
+            <a:ext cx="4206240" cy="804672"/>
+          </a:xfrm>
+          <a:prstGeom prst="roundRect">
+            <a:avLst>
+              <a:gd name="adj" fmla="val 9091"/>
+            </a:avLst>
+          </a:prstGeom>
+          <a:solidFill>
+            <a:srgbClr val="141F38"/>
+          </a:solidFill>
+          <a:ln w="9525">
+            <a:solidFill>
+              <a:srgbClr val="24365C"/>
+            </a:solidFill>
+            <a:prstDash val="solid"/>
+          </a:ln>
+        </p:spPr>
+      </p:sp>
+      <p:sp>
+        <p:nvSpPr>
+          <p:cNvPr id="20" name="Shape 18"/>
+          <p:cNvSpPr/>
+          <p:nvPr/>
+        </p:nvSpPr>
+        <p:spPr>
+          <a:xfrm>
+            <a:off x="4892040" y="5193792"/>
+            <a:ext cx="6720840" cy="804672"/>
+          </a:xfrm>
+          <a:prstGeom prst="roundRect">
+            <a:avLst>
+              <a:gd name="adj" fmla="val 9091"/>
+            </a:avLst>
+          </a:prstGeom>
+          <a:solidFill>
+            <a:srgbClr val="10182B"/>
+          </a:solidFill>
+          <a:ln w="9525">
+            <a:solidFill>
+              <a:srgbClr val="24365C"/>
+            </a:solidFill>
+            <a:prstDash val="solid"/>
+          </a:ln>
+        </p:spPr>
+      </p:sp>
+      <p:sp>
+        <p:nvSpPr>
+          <p:cNvPr id="21" name="Text 19"/>
+          <p:cNvSpPr/>
+          <p:nvPr/>
+        </p:nvSpPr>
+        <p:spPr>
+          <a:xfrm>
+            <a:off x="777240" y="5248656"/>
+            <a:ext cx="3749040" cy="694944"/>
+          </a:xfrm>
+          <a:prstGeom prst="rect">
+            <a:avLst/>
+          </a:prstGeom>
+          <a:noFill/>
+          <a:ln/>
+        </p:spPr>
+        <p:txBody>
+          <a:bodyPr wrap="square" rtlCol="0" anchor="ctr"/>
+          <a:lstStyle/>
+          <a:p>
+            <a:pPr indent="0" marL="0">
+              <a:buNone/>
+            </a:pPr>
+            <a:r>
+              <a:rPr lang="en-US" sz="1350" b="1" dirty="0">
+                <a:solidFill>
+                  <a:srgbClr val="22D3EE"/>
+                </a:solidFill>
+                <a:latin typeface="Calibri" pitchFamily="34" charset="0"/>
+                <a:ea typeface="Calibri" pitchFamily="34" charset="-122"/>
+                <a:cs typeface="Calibri" pitchFamily="34" charset="-120"/>
+              </a:rPr>
+              <a:t>Auditability &amp; legal admissibility</a:t>
+            </a:r>
+            <a:endParaRPr lang="en-US" sz="1350" dirty="0"/>
+          </a:p>
+        </p:txBody>
+      </p:sp>
+      <p:sp>
+        <p:nvSpPr>
+          <p:cNvPr id="22" name="Text 20"/>
+          <p:cNvSpPr/>
+          <p:nvPr/>
+        </p:nvSpPr>
+        <p:spPr>
+          <a:xfrm>
+            <a:off x="5120640" y="5248656"/>
+            <a:ext cx="6309360" cy="694944"/>
+          </a:xfrm>
+          <a:prstGeom prst="rect">
+            <a:avLst/>
+          </a:prstGeom>
+          <a:noFill/>
+          <a:ln/>
+        </p:spPr>
+        <p:txBody>
+          <a:bodyPr wrap="square" rtlCol="0" anchor="ctr"/>
+          <a:lstStyle/>
+          <a:p>
+            <a:pPr indent="0" marL="0">
+              <a:buNone/>
+            </a:pPr>
+            <a:r>
+              <a:rPr lang="en-US" sz="1250" dirty="0">
+                <a:solidFill>
+                  <a:srgbClr val="DBE6F7"/>
+                </a:solidFill>
+                <a:latin typeface="Calibri" pitchFamily="34" charset="0"/>
+                <a:ea typeface="Calibri" pitchFamily="34" charset="-122"/>
+                <a:cs typeface="Calibri" pitchFamily="34" charset="-120"/>
+              </a:rPr>
+              <a:t>SHA-256-sealed, timestamped evidence packages with chain-of-custody metadata</a:t>
+            </a:r>
+            <a:endParaRPr lang="en-US" sz="1250" dirty="0"/>
+          </a:p>
+        </p:txBody>
+      </p:sp>
+      <p:sp>
+        <p:nvSpPr>
+          <p:cNvPr id="23" name="Text 21"/>
+          <p:cNvSpPr/>
+          <p:nvPr/>
+        </p:nvSpPr>
+        <p:spPr>
+          <a:xfrm>
+            <a:off x="457200" y="6446520"/>
+            <a:ext cx="6400800" cy="320040"/>
+          </a:xfrm>
+          <a:prstGeom prst="rect">
+            <a:avLst/>
+          </a:prstGeom>
+          <a:noFill/>
+          <a:ln/>
+        </p:spPr>
+        <p:txBody>
+          <a:bodyPr wrap="square" rtlCol="0" anchor="ctr"/>
+          <a:lstStyle/>
+          <a:p>
+            <a:pPr indent="0" marL="0">
+              <a:buNone/>
+            </a:pPr>
+            <a:r>
+              <a:rPr lang="en-US" sz="900" dirty="0">
+                <a:solidFill>
+                  <a:srgbClr val="8CA0C4"/>
+                </a:solidFill>
+                <a:latin typeface="Calibri" pitchFamily="34" charset="0"/>
+                <a:ea typeface="Calibri" pitchFamily="34" charset="-122"/>
+                <a:cs typeface="Calibri" pitchFamily="34" charset="-120"/>
+              </a:rPr>
+              <a:t>PRAHARI — ET AI Hackathon 2.0 · Problem Statement #6</a:t>
+            </a:r>
+            <a:endParaRPr lang="en-US" sz="900" dirty="0"/>
+          </a:p>
+        </p:txBody>
+      </p:sp>
+      <p:sp>
+        <p:nvSpPr>
+          <p:cNvPr id="24" name="Text 22"/>
+          <p:cNvSpPr/>
+          <p:nvPr/>
+        </p:nvSpPr>
+        <p:spPr>
+          <a:xfrm>
+            <a:off x="11430000" y="6446520"/>
+            <a:ext cx="365760" cy="320040"/>
+          </a:xfrm>
+          <a:prstGeom prst="rect">
+            <a:avLst/>
+          </a:prstGeom>
+          <a:noFill/>
+          <a:ln/>
+        </p:spPr>
+        <p:txBody>
+          <a:bodyPr wrap="square" rtlCol="0" anchor="ctr"/>
+          <a:lstStyle/>
+          <a:p>
+            <a:pPr algn="r" indent="0" marL="0">
+              <a:buNone/>
+            </a:pPr>
+            <a:r>
+              <a:rPr lang="en-US" sz="900" dirty="0">
+                <a:solidFill>
+                  <a:srgbClr val="8CA0C4"/>
+                </a:solidFill>
+                <a:latin typeface="Calibri" pitchFamily="34" charset="0"/>
+                <a:ea typeface="Calibri" pitchFamily="34" charset="-122"/>
+                <a:cs typeface="Calibri" pitchFamily="34" charset="-120"/>
+              </a:rPr>
+              <a:t>10</a:t>
+            </a:r>
+            <a:endParaRPr lang="en-US" sz="900" dirty="0"/>
+          </a:p>
+        </p:txBody>
+      </p:sp>
+    </p:spTree>
+  </p:cSld>
+  <p:clrMapOvr>
+    <a:masterClrMapping/>
+  </p:clrMapOvr>
+</p:sld>
+</file>
+
+<file path=ppt/slides/slide11.xml><?xml version="1.0" encoding="utf-8"?>
+<p:sld xmlns:a="http://schemas.openxmlformats.org/drawingml/2006/main" xmlns:r="http://schemas.openxmlformats.org/officeDocument/2006/relationships" xmlns:p="http://schemas.openxmlformats.org/presentationml/2006/main">
+  <p:cSld name="Slide 11">
+    <p:bg>
+      <p:bgPr>
+        <a:solidFill>
+          <a:srgbClr val="0C1220"/>
+        </a:solidFill>
+      </p:bgPr>
+    </p:bg>
+    <p:spTree>
+      <p:nvGrpSpPr>
+        <p:cNvPr id="1" name=""/>
+        <p:cNvGrpSpPr/>
+        <p:nvPr/>
+      </p:nvGrpSpPr>
+      <p:grpSpPr>
+        <a:xfrm>
+          <a:off x="0" y="0"/>
+          <a:ext cx="0" cy="0"/>
+          <a:chOff x="0" y="0"/>
+          <a:chExt cx="0" cy="0"/>
+        </a:xfrm>
+      </p:grpSpPr>
+      <p:sp>
+        <p:nvSpPr>
+          <p:cNvPr id="2" name="Text 0"/>
+          <p:cNvSpPr/>
+          <p:nvPr/>
+        </p:nvSpPr>
+        <p:spPr>
+          <a:xfrm>
+            <a:off x="914400" y="1371600"/>
+            <a:ext cx="10360152" cy="1463040"/>
+          </a:xfrm>
+          <a:prstGeom prst="rect">
+            <a:avLst/>
+          </a:prstGeom>
+          <a:noFill/>
+          <a:ln/>
+        </p:spPr>
+        <p:txBody>
+          <a:bodyPr wrap="square" rtlCol="0" anchor="ctr"/>
+          <a:lstStyle/>
+          <a:p>
+            <a:pPr algn="ctr" indent="0" marL="0">
+              <a:lnSpc>
+                <a:spcPts val="4200"/>
+              </a:lnSpc>
+              <a:buNone/>
+            </a:pPr>
+            <a:r>
+              <a:rPr lang="en-US" sz="3400" b="1" dirty="0">
+                <a:solidFill>
+                  <a:srgbClr val="FFFFFF"/>
+                </a:solidFill>
+                <a:latin typeface="Arial" pitchFamily="34" charset="0"/>
+                <a:ea typeface="Arial" pitchFamily="34" charset="-122"/>
+                <a:cs typeface="Arial" pitchFamily="34" charset="-120"/>
+              </a:rPr>
+              <a:t>The window that matters is before the money moves.</a:t>
+            </a:r>
+            <a:endParaRPr lang="en-US" sz="3400" dirty="0"/>
+          </a:p>
+        </p:txBody>
+      </p:sp>
+      <p:sp>
+        <p:nvSpPr>
+          <p:cNvPr id="3" name="Text 1"/>
+          <p:cNvSpPr/>
+          <p:nvPr/>
+        </p:nvSpPr>
+        <p:spPr>
+          <a:xfrm>
+            <a:off x="1371600" y="2880360"/>
+            <a:ext cx="9445752" cy="914400"/>
+          </a:xfrm>
+          <a:prstGeom prst="rect">
+            <a:avLst/>
+          </a:prstGeom>
+          <a:noFill/>
+          <a:ln/>
+        </p:spPr>
+        <p:txBody>
+          <a:bodyPr wrap="square" rtlCol="0" anchor="ctr"/>
+          <a:lstStyle/>
+          <a:p>
+            <a:pPr algn="ctr" indent="0" marL="0">
+              <a:lnSpc>
+                <a:spcPts val="2600"/>
+              </a:lnSpc>
+              <a:buNone/>
+            </a:pPr>
+            <a:r>
+              <a:rPr lang="en-US" sz="1800" dirty="0">
+                <a:solidFill>
+                  <a:srgbClr val="22D3EE"/>
+                </a:solidFill>
+                <a:latin typeface="Calibri" pitchFamily="34" charset="0"/>
+                <a:ea typeface="Calibri" pitchFamily="34" charset="-122"/>
+                <a:cs typeface="Calibri" pitchFamily="34" charset="-120"/>
+              </a:rPr>
+              <a:t>PRAHARI protects that window — for the citizen on the call,</a:t>
+            </a:r>
+            <a:endParaRPr lang="en-US" sz="1800" dirty="0"/>
+          </a:p>
+          <a:p>
+            <a:pPr algn="ctr" indent="0" marL="0">
+              <a:lnSpc>
+                <a:spcPts val="2600"/>
+              </a:lnSpc>
+              <a:buNone/>
+            </a:pPr>
+            <a:r>
+              <a:rPr lang="en-US" sz="1800" dirty="0">
+                <a:solidFill>
+                  <a:srgbClr val="22D3EE"/>
+                </a:solidFill>
+                <a:latin typeface="Calibri" pitchFamily="34" charset="0"/>
+                <a:ea typeface="Calibri" pitchFamily="34" charset="-122"/>
+                <a:cs typeface="Calibri" pitchFamily="34" charset="-120"/>
+              </a:rPr>
+              <a:t>the teller at the counter, and the officer chasing the network.</a:t>
+            </a:r>
+            <a:endParaRPr lang="en-US" sz="1800" dirty="0"/>
+          </a:p>
+        </p:txBody>
+      </p:sp>
+      <p:sp>
+        <p:nvSpPr>
+          <p:cNvPr id="4" name="Shape 2"/>
+          <p:cNvSpPr/>
+          <p:nvPr/>
+        </p:nvSpPr>
+        <p:spPr>
+          <a:xfrm>
+            <a:off x="914400" y="4114800"/>
+            <a:ext cx="3246120" cy="1371600"/>
+          </a:xfrm>
+          <a:prstGeom prst="roundRect">
+            <a:avLst>
+              <a:gd name="adj" fmla="val 5333"/>
+            </a:avLst>
+          </a:prstGeom>
+          <a:solidFill>
+            <a:srgbClr val="141F38"/>
+          </a:solidFill>
+          <a:ln w="9525">
+            <a:solidFill>
+              <a:srgbClr val="24365C"/>
+            </a:solidFill>
+            <a:prstDash val="solid"/>
+          </a:ln>
+        </p:spPr>
+      </p:sp>
+      <p:sp>
+        <p:nvSpPr>
+          <p:cNvPr id="5" name="Text 3"/>
+          <p:cNvSpPr/>
+          <p:nvPr/>
+        </p:nvSpPr>
+        <p:spPr>
+          <a:xfrm>
+            <a:off x="1097280" y="4251960"/>
+            <a:ext cx="2880360" cy="365760"/>
+          </a:xfrm>
+          <a:prstGeom prst="rect">
+            <a:avLst/>
+          </a:prstGeom>
+          <a:noFill/>
+          <a:ln/>
+        </p:spPr>
+        <p:txBody>
+          <a:bodyPr wrap="square" rtlCol="0" anchor="ctr"/>
+          <a:lstStyle/>
+          <a:p>
+            <a:pPr indent="0" marL="0">
+              <a:buNone/>
+            </a:pPr>
+            <a:r>
+              <a:rPr lang="en-US" sz="1500" b="1" dirty="0">
+                <a:solidFill>
+                  <a:srgbClr val="FBBF24"/>
+                </a:solidFill>
+                <a:latin typeface="Arial" pitchFamily="34" charset="0"/>
+                <a:ea typeface="Arial" pitchFamily="34" charset="-122"/>
+                <a:cs typeface="Arial" pitchFamily="34" charset="-120"/>
+              </a:rPr>
+              <a:t>0–3 mo</a:t>
+            </a:r>
+            <a:endParaRPr lang="en-US" sz="1500" dirty="0"/>
+          </a:p>
+        </p:txBody>
+      </p:sp>
+      <p:sp>
+        <p:nvSpPr>
+          <p:cNvPr id="6" name="Text 4"/>
+          <p:cNvSpPr/>
+          <p:nvPr/>
+        </p:nvSpPr>
+        <p:spPr>
+          <a:xfrm>
+            <a:off x="1097280" y="4617720"/>
+            <a:ext cx="2880360" cy="777240"/>
+          </a:xfrm>
+          <a:prstGeom prst="rect">
+            <a:avLst/>
+          </a:prstGeom>
+          <a:noFill/>
+          <a:ln/>
+        </p:spPr>
+        <p:txBody>
+          <a:bodyPr wrap="square" rtlCol="0" anchor="ctr"/>
+          <a:lstStyle/>
+          <a:p>
+            <a:pPr indent="0" marL="0">
+              <a:lnSpc>
+                <a:spcPts val="1600"/>
+              </a:lnSpc>
+              <a:buNone/>
+            </a:pPr>
+            <a:r>
+              <a:rPr lang="en-US" sz="1150" dirty="0">
+                <a:solidFill>
+                  <a:srgbClr val="DBE6F7"/>
+                </a:solidFill>
+                <a:latin typeface="Calibri" pitchFamily="34" charset="0"/>
+                <a:ea typeface="Calibri" pitchFamily="34" charset="-122"/>
+                <a:cs typeface="Calibri" pitchFamily="34" charset="-120"/>
+              </a:rPr>
+              <a:t>Telecom-circle pilot · classifier fine-tuned on I4C corpus</a:t>
+            </a:r>
+            <a:endParaRPr lang="en-US" sz="1150" dirty="0"/>
+          </a:p>
+        </p:txBody>
+      </p:sp>
+      <p:sp>
+        <p:nvSpPr>
+          <p:cNvPr id="7" name="Shape 5"/>
+          <p:cNvSpPr/>
+          <p:nvPr/>
+        </p:nvSpPr>
+        <p:spPr>
+          <a:xfrm>
+            <a:off x="4434840" y="4114800"/>
+            <a:ext cx="3246120" cy="1371600"/>
+          </a:xfrm>
+          <a:prstGeom prst="roundRect">
+            <a:avLst>
+              <a:gd name="adj" fmla="val 5333"/>
+            </a:avLst>
+          </a:prstGeom>
+          <a:solidFill>
+            <a:srgbClr val="141F38"/>
+          </a:solidFill>
+          <a:ln w="9525">
+            <a:solidFill>
+              <a:srgbClr val="24365C"/>
+            </a:solidFill>
+            <a:prstDash val="solid"/>
+          </a:ln>
+        </p:spPr>
+      </p:sp>
+      <p:sp>
+        <p:nvSpPr>
+          <p:cNvPr id="8" name="Text 6"/>
+          <p:cNvSpPr/>
+          <p:nvPr/>
+        </p:nvSpPr>
+        <p:spPr>
+          <a:xfrm>
+            <a:off x="4617720" y="4251960"/>
+            <a:ext cx="2880360" cy="365760"/>
+          </a:xfrm>
+          <a:prstGeom prst="rect">
+            <a:avLst/>
+          </a:prstGeom>
+          <a:noFill/>
+          <a:ln/>
+        </p:spPr>
+        <p:txBody>
+          <a:bodyPr wrap="square" rtlCol="0" anchor="ctr"/>
+          <a:lstStyle/>
+          <a:p>
+            <a:pPr indent="0" marL="0">
+              <a:buNone/>
+            </a:pPr>
+            <a:r>
+              <a:rPr lang="en-US" sz="1500" b="1" dirty="0">
+                <a:solidFill>
+                  <a:srgbClr val="FBBF24"/>
+                </a:solidFill>
+                <a:latin typeface="Arial" pitchFamily="34" charset="0"/>
+                <a:ea typeface="Arial" pitchFamily="34" charset="-122"/>
+                <a:cs typeface="Arial" pitchFamily="34" charset="-120"/>
+              </a:rPr>
+              <a:t>3–9 mo</a:t>
+            </a:r>
+            <a:endParaRPr lang="en-US" sz="1500" dirty="0"/>
+          </a:p>
+        </p:txBody>
+      </p:sp>
+      <p:sp>
+        <p:nvSpPr>
+          <p:cNvPr id="9" name="Text 7"/>
+          <p:cNvSpPr/>
+          <p:nvPr/>
+        </p:nvSpPr>
+        <p:spPr>
+          <a:xfrm>
+            <a:off x="4617720" y="4617720"/>
+            <a:ext cx="2880360" cy="777240"/>
+          </a:xfrm>
+          <a:prstGeom prst="rect">
+            <a:avLst/>
+          </a:prstGeom>
+          <a:noFill/>
+          <a:ln/>
+        </p:spPr>
+        <p:txBody>
+          <a:bodyPr wrap="square" rtlCol="0" anchor="ctr"/>
+          <a:lstStyle/>
+          <a:p>
+            <a:pPr indent="0" marL="0">
+              <a:lnSpc>
+                <a:spcPts val="1600"/>
+              </a:lnSpc>
+              <a:buNone/>
+            </a:pPr>
+            <a:r>
+              <a:rPr lang="en-US" sz="1150" dirty="0">
+                <a:solidFill>
+                  <a:srgbClr val="DBE6F7"/>
+                </a:solidFill>
+                <a:latin typeface="Calibri" pitchFamily="34" charset="0"/>
+                <a:ea typeface="Calibri" pitchFamily="34" charset="-122"/>
+                <a:cs typeface="Calibri" pitchFamily="34" charset="-120"/>
+              </a:rPr>
+              <a:t>Bank &amp; counting-machine integration · I4C pipeline ingestion</a:t>
+            </a:r>
+            <a:endParaRPr lang="en-US" sz="1150" dirty="0"/>
+          </a:p>
+        </p:txBody>
+      </p:sp>
+      <p:sp>
+        <p:nvSpPr>
+          <p:cNvPr id="10" name="Shape 8"/>
+          <p:cNvSpPr/>
+          <p:nvPr/>
+        </p:nvSpPr>
+        <p:spPr>
+          <a:xfrm>
+            <a:off x="7955280" y="4114800"/>
+            <a:ext cx="3246120" cy="1371600"/>
+          </a:xfrm>
+          <a:prstGeom prst="roundRect">
+            <a:avLst>
+              <a:gd name="adj" fmla="val 5333"/>
+            </a:avLst>
+          </a:prstGeom>
+          <a:solidFill>
+            <a:srgbClr val="141F38"/>
+          </a:solidFill>
+          <a:ln w="9525">
+            <a:solidFill>
+              <a:srgbClr val="24365C"/>
+            </a:solidFill>
+            <a:prstDash val="solid"/>
+          </a:ln>
+        </p:spPr>
+      </p:sp>
+      <p:sp>
+        <p:nvSpPr>
+          <p:cNvPr id="11" name="Text 9"/>
+          <p:cNvSpPr/>
+          <p:nvPr/>
+        </p:nvSpPr>
+        <p:spPr>
+          <a:xfrm>
+            <a:off x="8138160" y="4251960"/>
+            <a:ext cx="2880360" cy="365760"/>
+          </a:xfrm>
+          <a:prstGeom prst="rect">
+            <a:avLst/>
+          </a:prstGeom>
+          <a:noFill/>
+          <a:ln/>
+        </p:spPr>
+        <p:txBody>
+          <a:bodyPr wrap="square" rtlCol="0" anchor="ctr"/>
+          <a:lstStyle/>
+          <a:p>
+            <a:pPr indent="0" marL="0">
+              <a:buNone/>
+            </a:pPr>
+            <a:r>
+              <a:rPr lang="en-US" sz="1500" b="1" dirty="0">
+                <a:solidFill>
+                  <a:srgbClr val="FBBF24"/>
+                </a:solidFill>
+                <a:latin typeface="Arial" pitchFamily="34" charset="0"/>
+                <a:ea typeface="Arial" pitchFamily="34" charset="-122"/>
+                <a:cs typeface="Arial" pitchFamily="34" charset="-120"/>
+              </a:rPr>
+              <a:t>9–18 mo</a:t>
+            </a:r>
+            <a:endParaRPr lang="en-US" sz="1500" dirty="0"/>
+          </a:p>
+        </p:txBody>
+      </p:sp>
+      <p:sp>
+        <p:nvSpPr>
+          <p:cNvPr id="12" name="Text 10"/>
+          <p:cNvSpPr/>
+          <p:nvPr/>
+        </p:nvSpPr>
+        <p:spPr>
+          <a:xfrm>
+            <a:off x="8138160" y="4617720"/>
+            <a:ext cx="2880360" cy="777240"/>
+          </a:xfrm>
+          <a:prstGeom prst="rect">
+            <a:avLst/>
+          </a:prstGeom>
+          <a:noFill/>
+          <a:ln/>
+        </p:spPr>
+        <p:txBody>
+          <a:bodyPr wrap="square" rtlCol="0" anchor="ctr"/>
+          <a:lstStyle/>
+          <a:p>
+            <a:pPr indent="0" marL="0">
+              <a:lnSpc>
+                <a:spcPts val="1600"/>
+              </a:lnSpc>
+              <a:buNone/>
+            </a:pPr>
+            <a:r>
+              <a:rPr lang="en-US" sz="1150" dirty="0">
+                <a:solidFill>
+                  <a:srgbClr val="DBE6F7"/>
+                </a:solidFill>
+                <a:latin typeface="Calibri" pitchFamily="34" charset="0"/>
+                <a:ea typeface="Calibri" pitchFamily="34" charset="-122"/>
+                <a:cs typeface="Calibri" pitchFamily="34" charset="-120"/>
+              </a:rPr>
+              <a:t>National rollout · deepfake detection · 12-language Citizen Shield</a:t>
+            </a:r>
+            <a:endParaRPr lang="en-US" sz="1150" dirty="0"/>
+          </a:p>
+        </p:txBody>
+      </p:sp>
+      <p:sp>
+        <p:nvSpPr>
+          <p:cNvPr id="13" name="Text 11"/>
+          <p:cNvSpPr/>
+          <p:nvPr/>
+        </p:nvSpPr>
+        <p:spPr>
+          <a:xfrm>
+            <a:off x="457200" y="5943600"/>
+            <a:ext cx="11274552" cy="457200"/>
+          </a:xfrm>
+          <a:prstGeom prst="rect">
+            <a:avLst/>
+          </a:prstGeom>
+          <a:noFill/>
+          <a:ln/>
+        </p:spPr>
+        <p:txBody>
+          <a:bodyPr wrap="square" rtlCol="0" anchor="ctr"/>
+          <a:lstStyle/>
+          <a:p>
+            <a:pPr algn="ctr" indent="0" marL="0">
+              <a:buNone/>
+            </a:pPr>
+            <a:r>
+              <a:rPr lang="en-US" sz="1500" i="1" dirty="0">
+                <a:solidFill>
+                  <a:srgbClr val="8CA0C4"/>
+                </a:solidFill>
+                <a:latin typeface="Calibri" pitchFamily="34" charset="0"/>
+                <a:ea typeface="Calibri" pitchFamily="34" charset="-122"/>
+                <a:cs typeface="Calibri" pitchFamily="34" charset="-120"/>
+              </a:rPr>
+              <a:t>PRAHARI · Predict. Protect. Prosecute.  ·  try it: sanskar9999.github.io/prahari</a:t>
+            </a:r>
+            <a:endParaRPr lang="en-US" sz="1500" dirty="0"/>
+          </a:p>
+        </p:txBody>
+      </p:sp>
     </p:spTree>
   </p:cSld>
   <p:clrMapOvr>
@@ -3948,7 +5473,7 @@
               <a:buNone/>
             </a:pPr>
             <a:r>
-              <a:rPr lang="en-US" sz="3600" b="1" dirty="0">
+              <a:rPr lang="en-US" sz="3400" b="1" dirty="0">
                 <a:solidFill>
                   <a:srgbClr val="FFFFFF"/>
                 </a:solidFill>
@@ -3956,65 +5481,164 @@
                 <a:ea typeface="Arial" pitchFamily="34" charset="-122"/>
                 <a:cs typeface="Arial" pitchFamily="34" charset="-120"/>
               </a:rPr>
-              <a:t>Scam Shield — stopping the scam mid-call</a:t>
-            </a:r>
-            <a:endParaRPr lang="en-US" sz="3600" dirty="0"/>
-          </a:p>
-        </p:txBody>
-      </p:sp>
-      <p:sp>
-        <p:nvSpPr>
-          <p:cNvPr id="3" name="Shape 1"/>
-          <p:cNvSpPr/>
-          <p:nvPr/>
-        </p:nvSpPr>
+              <a:t>The product — live at sanskar9999.github.io/prahari</a:t>
+            </a:r>
+            <a:endParaRPr lang="en-US" sz="3400" dirty="0"/>
+          </a:p>
+        </p:txBody>
+      </p:sp>
+      <p:pic>
+        <p:nvPicPr>
+          <p:cNvPr id="3" name="Image 0" descr="C:\Users\91800\Desktop\ET Hack 2\Screenshots\Prahari_Command_Center.png">    </p:cNvPr>
+          <p:cNvPicPr>
+            <a:picLocks noChangeAspect="1"/>
+          </p:cNvPicPr>
+          <p:nvPr/>
+        </p:nvPicPr>
+        <p:blipFill>
+          <a:blip r:embed="rId1"/>
+          <a:stretch>
+            <a:fillRect/>
+          </a:stretch>
+        </p:blipFill>
         <p:spPr>
           <a:xfrm>
             <a:off x="548640" y="1463040"/>
-            <a:ext cx="6675120" cy="4754880"/>
-          </a:xfrm>
-          <a:prstGeom prst="roundRect">
-            <a:avLst>
-              <a:gd name="adj" fmla="val 1538"/>
-            </a:avLst>
-          </a:prstGeom>
-          <a:solidFill>
-            <a:srgbClr val="141F38"/>
-          </a:solidFill>
-          <a:ln w="9525">
-            <a:solidFill>
-              <a:srgbClr val="24365C"/>
-            </a:solidFill>
-            <a:prstDash val="solid"/>
-          </a:ln>
-        </p:spPr>
-      </p:sp>
-      <p:sp>
-        <p:nvSpPr>
-          <p:cNvPr id="4" name="Text 2"/>
-          <p:cNvSpPr/>
-          <p:nvPr/>
-        </p:nvSpPr>
-        <p:spPr>
-          <a:xfrm>
-            <a:off x="822960" y="1645920"/>
-            <a:ext cx="6126480" cy="365760"/>
-          </a:xfrm>
-          <a:prstGeom prst="rect">
-            <a:avLst/>
-          </a:prstGeom>
-          <a:noFill/>
-          <a:ln/>
-        </p:spPr>
-        <p:txBody>
-          <a:bodyPr wrap="square" rtlCol="0" anchor="ctr"/>
-          <a:lstStyle/>
-          <a:p>
-            <a:pPr indent="0" marL="0">
-              <a:buNone/>
-            </a:pPr>
-            <a:r>
-              <a:rPr lang="en-US" sz="1600" b="1" dirty="0">
+            <a:ext cx="5532120" cy="3108960"/>
+          </a:xfrm>
+          <a:prstGeom prst="rect">
+            <a:avLst/>
+          </a:prstGeom>
+        </p:spPr>
+      </p:pic>
+      <p:sp>
+        <p:nvSpPr>
+          <p:cNvPr id="4" name="Text 1"/>
+          <p:cNvSpPr/>
+          <p:nvPr/>
+        </p:nvSpPr>
+        <p:spPr>
+          <a:xfrm>
+            <a:off x="548640" y="4617720"/>
+            <a:ext cx="5532120" cy="457200"/>
+          </a:xfrm>
+          <a:prstGeom prst="rect">
+            <a:avLst/>
+          </a:prstGeom>
+          <a:noFill/>
+          <a:ln/>
+        </p:spPr>
+        <p:txBody>
+          <a:bodyPr wrap="square" rtlCol="0" anchor="ctr"/>
+          <a:lstStyle/>
+          <a:p>
+            <a:pPr algn="ctr" indent="0" marL="0">
+              <a:buNone/>
+            </a:pPr>
+            <a:r>
+              <a:rPr lang="en-US" sz="1250" dirty="0">
+                <a:solidFill>
+                  <a:srgbClr val="8CA0C4"/>
+                </a:solidFill>
+                <a:latin typeface="Calibri" pitchFamily="34" charset="0"/>
+                <a:ea typeface="Calibri" pitchFamily="34" charset="-122"/>
+                <a:cs typeface="Calibri" pitchFamily="34" charset="-120"/>
+              </a:rPr>
+              <a:t>National Command Centre — live threat map + fused intelligence feed</a:t>
+            </a:r>
+            <a:endParaRPr lang="en-US" sz="1250" dirty="0"/>
+          </a:p>
+        </p:txBody>
+      </p:sp>
+      <p:pic>
+        <p:nvPicPr>
+          <p:cNvPr id="5" name="Image 1" descr="C:\Users\91800\Desktop\ET Hack 2\Screenshots\Live_Intercept.png">    </p:cNvPr>
+          <p:cNvPicPr>
+            <a:picLocks noChangeAspect="1"/>
+          </p:cNvPicPr>
+          <p:nvPr/>
+        </p:nvPicPr>
+        <p:blipFill>
+          <a:blip r:embed="rId2"/>
+          <a:stretch>
+            <a:fillRect/>
+          </a:stretch>
+        </p:blipFill>
+        <p:spPr>
+          <a:xfrm>
+            <a:off x="6309360" y="1463040"/>
+            <a:ext cx="5532120" cy="3108960"/>
+          </a:xfrm>
+          <a:prstGeom prst="rect">
+            <a:avLst/>
+          </a:prstGeom>
+        </p:spPr>
+      </p:pic>
+      <p:sp>
+        <p:nvSpPr>
+          <p:cNvPr id="6" name="Text 2"/>
+          <p:cNvSpPr/>
+          <p:nvPr/>
+        </p:nvSpPr>
+        <p:spPr>
+          <a:xfrm>
+            <a:off x="6309360" y="4617720"/>
+            <a:ext cx="5532120" cy="457200"/>
+          </a:xfrm>
+          <a:prstGeom prst="rect">
+            <a:avLst/>
+          </a:prstGeom>
+          <a:noFill/>
+          <a:ln/>
+        </p:spPr>
+        <p:txBody>
+          <a:bodyPr wrap="square" rtlCol="0" anchor="ctr"/>
+          <a:lstStyle/>
+          <a:p>
+            <a:pPr algn="ctr" indent="0" marL="0">
+              <a:buNone/>
+            </a:pPr>
+            <a:r>
+              <a:rPr lang="en-US" sz="1250" dirty="0">
+                <a:solidFill>
+                  <a:srgbClr val="8CA0C4"/>
+                </a:solidFill>
+                <a:latin typeface="Calibri" pitchFamily="34" charset="0"/>
+                <a:ea typeface="Calibri" pitchFamily="34" charset="-122"/>
+                <a:cs typeface="Calibri" pitchFamily="34" charset="-120"/>
+              </a:rPr>
+              <a:t>Live Intercept — a REAL scam recording transcribed, scored and cut off mid-sentence</a:t>
+            </a:r>
+            <a:endParaRPr lang="en-US" sz="1250" dirty="0"/>
+          </a:p>
+        </p:txBody>
+      </p:sp>
+      <p:sp>
+        <p:nvSpPr>
+          <p:cNvPr id="7" name="Text 3"/>
+          <p:cNvSpPr/>
+          <p:nvPr/>
+        </p:nvSpPr>
+        <p:spPr>
+          <a:xfrm>
+            <a:off x="548640" y="5394960"/>
+            <a:ext cx="11247120" cy="457200"/>
+          </a:xfrm>
+          <a:prstGeom prst="rect">
+            <a:avLst/>
+          </a:prstGeom>
+          <a:noFill/>
+          <a:ln/>
+        </p:spPr>
+        <p:txBody>
+          <a:bodyPr wrap="square" rtlCol="0" anchor="ctr"/>
+          <a:lstStyle/>
+          <a:p>
+            <a:pPr algn="ctr" indent="0" marL="0">
+              <a:buNone/>
+            </a:pPr>
+            <a:r>
+              <a:rPr lang="en-US" sz="1400" i="1" dirty="0">
                 <a:solidFill>
                   <a:srgbClr val="22D3EE"/>
                 </a:solidFill>
@@ -4022,471 +5646,15 @@
                 <a:ea typeface="Calibri" pitchFamily="34" charset="-122"/>
                 <a:cs typeface="Calibri" pitchFamily="34" charset="-120"/>
               </a:rPr>
-              <a:t>How it works</a:t>
-            </a:r>
-            <a:endParaRPr lang="en-US" sz="1600" dirty="0"/>
-          </a:p>
-        </p:txBody>
-      </p:sp>
-      <p:sp>
-        <p:nvSpPr>
-          <p:cNvPr id="5" name="Text 3"/>
-          <p:cNvSpPr/>
-          <p:nvPr/>
-        </p:nvSpPr>
-        <p:spPr>
-          <a:xfrm>
-            <a:off x="822960" y="2103120"/>
-            <a:ext cx="6126480" cy="3931920"/>
-          </a:xfrm>
-          <a:prstGeom prst="rect">
-            <a:avLst/>
-          </a:prstGeom>
-          <a:noFill/>
-          <a:ln/>
-        </p:spPr>
-        <p:txBody>
-          <a:bodyPr wrap="square" rtlCol="0" anchor="ctr"/>
-          <a:lstStyle/>
-          <a:p>
-            <a:pPr indent="0" marL="0">
-              <a:lnSpc>
-                <a:spcPts val="2200"/>
-              </a:lnSpc>
-              <a:buNone/>
-            </a:pPr>
-            <a:r>
-              <a:rPr lang="en-US" sz="1400" dirty="0">
-                <a:solidFill>
-                  <a:srgbClr val="DBE6F7"/>
-                </a:solidFill>
-                <a:latin typeface="Calibri" pitchFamily="34" charset="0"/>
-                <a:ea typeface="Calibri" pitchFamily="34" charset="-122"/>
-                <a:cs typeface="Calibri" pitchFamily="34" charset="-120"/>
-              </a:rPr>
-              <a:t>Live transcript is scored against five behavioural signal categories drawn from I4C-documented scam playbooks:
-</a:t>
+              <a:t>Fully static web app — every model runs in the browser. Works on judges' phones, no install.</a:t>
             </a:r>
             <a:endParaRPr lang="en-US" sz="1400" dirty="0"/>
           </a:p>
-          <a:p>
-            <a:pPr indent="0" marL="0">
-              <a:lnSpc>
-                <a:spcPts val="2200"/>
-              </a:lnSpc>
-              <a:buNone/>
-            </a:pPr>
-            <a:r>
-              <a:rPr lang="en-US" sz="1400" dirty="0">
-                <a:solidFill>
-                  <a:srgbClr val="F8536B"/>
-                </a:solidFill>
-                <a:latin typeface="Calibri" pitchFamily="34" charset="0"/>
-                <a:ea typeface="Calibri" pitchFamily="34" charset="-122"/>
-                <a:cs typeface="Calibri" pitchFamily="34" charset="-120"/>
-              </a:rPr>
-              <a:t>1  Authority impersonation — “CBI officer”, “arrest warrant”
-</a:t>
-            </a:r>
-            <a:pPr indent="0" marL="0">
-              <a:lnSpc>
-                <a:spcPts val="2200"/>
-              </a:lnSpc>
-              <a:buNone/>
-            </a:pPr>
-            <a:r>
-              <a:rPr lang="en-US" sz="1400" dirty="0">
-                <a:solidFill>
-                  <a:srgbClr val="C084FC"/>
-                </a:solidFill>
-                <a:latin typeface="Calibri" pitchFamily="34" charset="0"/>
-                <a:ea typeface="Calibri" pitchFamily="34" charset="-122"/>
-                <a:cs typeface="Calibri" pitchFamily="34" charset="-120"/>
-              </a:rPr>
-              <a:t>2  Victim isolation — “do not disconnect”, “tell no one”
-</a:t>
-            </a:r>
-            <a:pPr indent="0" marL="0">
-              <a:lnSpc>
-                <a:spcPts val="2200"/>
-              </a:lnSpc>
-              <a:buNone/>
-            </a:pPr>
-            <a:r>
-              <a:rPr lang="en-US" sz="1400" dirty="0">
-                <a:solidFill>
-                  <a:srgbClr val="FBBF24"/>
-                </a:solidFill>
-                <a:latin typeface="Calibri" pitchFamily="34" charset="0"/>
-                <a:ea typeface="Calibri" pitchFamily="34" charset="-122"/>
-                <a:cs typeface="Calibri" pitchFamily="34" charset="-120"/>
-              </a:rPr>
-              <a:t>3  Urgency &amp; fear — “within 30 minutes”, “non-bailable”
-</a:t>
-            </a:r>
-            <a:pPr indent="0" marL="0">
-              <a:lnSpc>
-                <a:spcPts val="2200"/>
-              </a:lnSpc>
-              <a:buNone/>
-            </a:pPr>
-            <a:r>
-              <a:rPr lang="en-US" sz="1400" dirty="0">
-                <a:solidFill>
-                  <a:srgbClr val="22D3EE"/>
-                </a:solidFill>
-                <a:latin typeface="Calibri" pitchFamily="34" charset="0"/>
-                <a:ea typeface="Calibri" pitchFamily="34" charset="-122"/>
-                <a:cs typeface="Calibri" pitchFamily="34" charset="-120"/>
-              </a:rPr>
-              <a:t>4  Financial extraction — “safe account”, “RTGS immediately”
-</a:t>
-            </a:r>
-            <a:pPr indent="0" marL="0">
-              <a:lnSpc>
-                <a:spcPts val="2200"/>
-              </a:lnSpc>
-              <a:buNone/>
-            </a:pPr>
-            <a:r>
-              <a:rPr lang="en-US" sz="1400" dirty="0">
-                <a:solidFill>
-                  <a:srgbClr val="34D399"/>
-                </a:solidFill>
-                <a:latin typeface="Calibri" pitchFamily="34" charset="0"/>
-                <a:ea typeface="Calibri" pitchFamily="34" charset="-122"/>
-                <a:cs typeface="Calibri" pitchFamily="34" charset="-120"/>
-              </a:rPr>
-              <a:t>5  Identity harvesting — Aadhaar, OTP, net-banking access
-</a:t>
-            </a:r>
-            <a:pPr indent="0" marL="0">
-              <a:lnSpc>
-                <a:spcPts val="2200"/>
-              </a:lnSpc>
-              <a:buNone/>
-            </a:pPr>
-            <a:r>
-              <a:rPr lang="en-US" sz="1400" dirty="0">
-                <a:solidFill>
-                  <a:srgbClr val="DBE6F7"/>
-                </a:solidFill>
-                <a:latin typeface="Calibri" pitchFamily="34" charset="0"/>
-                <a:ea typeface="Calibri" pitchFamily="34" charset="-122"/>
-                <a:cs typeface="Calibri" pitchFamily="34" charset="-120"/>
-              </a:rPr>
-              <a:t>Weighted signal fusion means no single keyword can trigger a false alarm — a genuine bank call scores near zero. Verdicts are explainable, phrase by phrase.</a:t>
-            </a:r>
-            <a:endParaRPr lang="en-US" sz="1400" dirty="0"/>
-          </a:p>
-        </p:txBody>
-      </p:sp>
-      <p:sp>
-        <p:nvSpPr>
-          <p:cNvPr id="6" name="Shape 4"/>
-          <p:cNvSpPr/>
-          <p:nvPr/>
-        </p:nvSpPr>
-        <p:spPr>
-          <a:xfrm>
-            <a:off x="7498080" y="1463040"/>
-            <a:ext cx="4114800" cy="2194560"/>
-          </a:xfrm>
-          <a:prstGeom prst="roundRect">
-            <a:avLst>
-              <a:gd name="adj" fmla="val 3333"/>
-            </a:avLst>
-          </a:prstGeom>
-          <a:solidFill>
-            <a:srgbClr val="1A0F1A"/>
-          </a:solidFill>
-          <a:ln w="9525">
-            <a:solidFill>
-              <a:srgbClr val="24365C"/>
-            </a:solidFill>
-            <a:prstDash val="solid"/>
-          </a:ln>
-        </p:spPr>
-      </p:sp>
-      <p:sp>
-        <p:nvSpPr>
-          <p:cNvPr id="7" name="Text 5"/>
-          <p:cNvSpPr/>
-          <p:nvPr/>
-        </p:nvSpPr>
-        <p:spPr>
-          <a:xfrm>
-            <a:off x="7726680" y="1691640"/>
-            <a:ext cx="3657600" cy="640080"/>
-          </a:xfrm>
-          <a:prstGeom prst="rect">
-            <a:avLst/>
-          </a:prstGeom>
-          <a:noFill/>
-          <a:ln/>
-        </p:spPr>
-        <p:txBody>
-          <a:bodyPr wrap="square" rtlCol="0" anchor="ctr"/>
-          <a:lstStyle/>
-          <a:p>
-            <a:pPr indent="0" marL="0">
-              <a:buNone/>
-            </a:pPr>
-            <a:r>
-              <a:rPr lang="en-US" sz="1600" b="1" dirty="0">
-                <a:solidFill>
-                  <a:srgbClr val="F8536B"/>
-                </a:solidFill>
-                <a:latin typeface="Arial" pitchFamily="34" charset="0"/>
-                <a:ea typeface="Arial" pitchFamily="34" charset="-122"/>
-                <a:cs typeface="Arial" pitchFamily="34" charset="-120"/>
-              </a:rPr>
-              <a:t>🚨 DIGITAL ARREST SCAM DETECTED</a:t>
-            </a:r>
-            <a:endParaRPr lang="en-US" sz="1600" dirty="0"/>
-          </a:p>
-        </p:txBody>
-      </p:sp>
-      <p:sp>
-        <p:nvSpPr>
-          <p:cNvPr id="8" name="Text 6"/>
-          <p:cNvSpPr/>
-          <p:nvPr/>
-        </p:nvSpPr>
-        <p:spPr>
-          <a:xfrm>
-            <a:off x="7726680" y="2377440"/>
-            <a:ext cx="3657600" cy="731520"/>
-          </a:xfrm>
-          <a:prstGeom prst="rect">
-            <a:avLst/>
-          </a:prstGeom>
-          <a:noFill/>
-          <a:ln/>
-        </p:spPr>
-        <p:txBody>
-          <a:bodyPr wrap="square" rtlCol="0" anchor="ctr"/>
-          <a:lstStyle/>
-          <a:p>
-            <a:pPr indent="0" marL="0">
-              <a:buNone/>
-            </a:pPr>
-            <a:r>
-              <a:rPr lang="en-US" sz="1300" dirty="0">
-                <a:solidFill>
-                  <a:srgbClr val="DBE6F7"/>
-                </a:solidFill>
-                <a:latin typeface="Calibri" pitchFamily="34" charset="0"/>
-                <a:ea typeface="Calibri" pitchFamily="34" charset="-122"/>
-                <a:cs typeface="Calibri" pitchFamily="34" charset="-120"/>
-              </a:rPr>
-              <a:t>Risk 97/100 · verdict in &lt;2s</a:t>
-            </a:r>
-            <a:endParaRPr lang="en-US" sz="1300" dirty="0"/>
-          </a:p>
-          <a:p>
-            <a:pPr indent="0" marL="0">
-              <a:buNone/>
-            </a:pPr>
-            <a:r>
-              <a:rPr lang="en-US" sz="1300" dirty="0">
-                <a:solidFill>
-                  <a:srgbClr val="DBE6F7"/>
-                </a:solidFill>
-                <a:latin typeface="Calibri" pitchFamily="34" charset="0"/>
-                <a:ea typeface="Calibri" pitchFamily="34" charset="-122"/>
-                <a:cs typeface="Calibri" pitchFamily="34" charset="-120"/>
-              </a:rPr>
-              <a:t>Victim alerted before the transfer</a:t>
-            </a:r>
-            <a:endParaRPr lang="en-US" sz="1300" dirty="0"/>
-          </a:p>
-        </p:txBody>
-      </p:sp>
-      <p:sp>
-        <p:nvSpPr>
-          <p:cNvPr id="9" name="Text 7"/>
-          <p:cNvSpPr/>
-          <p:nvPr/>
-        </p:nvSpPr>
-        <p:spPr>
-          <a:xfrm>
-            <a:off x="7726680" y="3063240"/>
-            <a:ext cx="3657600" cy="548640"/>
-          </a:xfrm>
-          <a:prstGeom prst="rect">
-            <a:avLst/>
-          </a:prstGeom>
-          <a:noFill/>
-          <a:ln/>
-        </p:spPr>
-        <p:txBody>
-          <a:bodyPr wrap="square" rtlCol="0" anchor="ctr"/>
-          <a:lstStyle/>
-          <a:p>
-            <a:pPr indent="0" marL="0">
-              <a:buNone/>
-            </a:pPr>
-            <a:r>
-              <a:rPr lang="en-US" sz="1100" dirty="0">
-                <a:solidFill>
-                  <a:srgbClr val="8CA0C4"/>
-                </a:solidFill>
-                <a:latin typeface="Calibri" pitchFamily="34" charset="0"/>
-                <a:ea typeface="Calibri" pitchFamily="34" charset="-122"/>
-                <a:cs typeface="Calibri" pitchFamily="34" charset="-120"/>
-              </a:rPr>
-              <a:t>✓ Victim device push-alert</a:t>
-            </a:r>
-            <a:endParaRPr lang="en-US" sz="1100" dirty="0"/>
-          </a:p>
-          <a:p>
-            <a:pPr indent="0" marL="0">
-              <a:buNone/>
-            </a:pPr>
-            <a:r>
-              <a:rPr lang="en-US" sz="1100" dirty="0">
-                <a:solidFill>
-                  <a:srgbClr val="8CA0C4"/>
-                </a:solidFill>
-                <a:latin typeface="Calibri" pitchFamily="34" charset="0"/>
-                <a:ea typeface="Calibri" pitchFamily="34" charset="-122"/>
-                <a:cs typeface="Calibri" pitchFamily="34" charset="-120"/>
-              </a:rPr>
-              <a:t>✓ Telecom spoof-block request</a:t>
-            </a:r>
-            <a:endParaRPr lang="en-US" sz="1100" dirty="0"/>
-          </a:p>
-          <a:p>
-            <a:pPr indent="0" marL="0">
-              <a:buNone/>
-            </a:pPr>
-            <a:r>
-              <a:rPr lang="en-US" sz="1100" dirty="0">
-                <a:solidFill>
-                  <a:srgbClr val="8CA0C4"/>
-                </a:solidFill>
-                <a:latin typeface="Calibri" pitchFamily="34" charset="0"/>
-                <a:ea typeface="Calibri" pitchFamily="34" charset="-122"/>
-                <a:cs typeface="Calibri" pitchFamily="34" charset="-120"/>
-              </a:rPr>
-              <a:t>✓ MHA / I4C report auto-generated</a:t>
-            </a:r>
-            <a:endParaRPr lang="en-US" sz="1100" dirty="0"/>
-          </a:p>
-        </p:txBody>
-      </p:sp>
-      <p:sp>
-        <p:nvSpPr>
-          <p:cNvPr id="10" name="Shape 8"/>
-          <p:cNvSpPr/>
-          <p:nvPr/>
-        </p:nvSpPr>
-        <p:spPr>
-          <a:xfrm>
-            <a:off x="7498080" y="3931920"/>
-            <a:ext cx="4114800" cy="2286000"/>
-          </a:xfrm>
-          <a:prstGeom prst="roundRect">
-            <a:avLst>
-              <a:gd name="adj" fmla="val 3200"/>
-            </a:avLst>
-          </a:prstGeom>
-          <a:solidFill>
-            <a:srgbClr val="141F38"/>
-          </a:solidFill>
-          <a:ln w="9525">
-            <a:solidFill>
-              <a:srgbClr val="24365C"/>
-            </a:solidFill>
-            <a:prstDash val="solid"/>
-          </a:ln>
-        </p:spPr>
-      </p:sp>
-      <p:sp>
-        <p:nvSpPr>
-          <p:cNvPr id="11" name="Text 9"/>
-          <p:cNvSpPr/>
-          <p:nvPr/>
-        </p:nvSpPr>
-        <p:spPr>
-          <a:xfrm>
-            <a:off x="7726680" y="4114800"/>
-            <a:ext cx="3657600" cy="365760"/>
-          </a:xfrm>
-          <a:prstGeom prst="rect">
-            <a:avLst/>
-          </a:prstGeom>
-          <a:noFill/>
-          <a:ln/>
-        </p:spPr>
-        <p:txBody>
-          <a:bodyPr wrap="square" rtlCol="0" anchor="ctr"/>
-          <a:lstStyle/>
-          <a:p>
-            <a:pPr indent="0" marL="0">
-              <a:buNone/>
-            </a:pPr>
-            <a:r>
-              <a:rPr lang="en-US" sz="1400" b="1" dirty="0">
-                <a:solidFill>
-                  <a:srgbClr val="22D3EE"/>
-                </a:solidFill>
-                <a:latin typeface="Calibri" pitchFamily="34" charset="0"/>
-                <a:ea typeface="Calibri" pitchFamily="34" charset="-122"/>
-                <a:cs typeface="Calibri" pitchFamily="34" charset="-120"/>
-              </a:rPr>
-              <a:t>Real, not staged</a:t>
-            </a:r>
-            <a:endParaRPr lang="en-US" sz="1400" dirty="0"/>
-          </a:p>
-        </p:txBody>
-      </p:sp>
-      <p:sp>
-        <p:nvSpPr>
-          <p:cNvPr id="12" name="Text 10"/>
-          <p:cNvSpPr/>
-          <p:nvPr/>
-        </p:nvSpPr>
-        <p:spPr>
-          <a:xfrm>
-            <a:off x="7726680" y="4526280"/>
-            <a:ext cx="3657600" cy="1554480"/>
-          </a:xfrm>
-          <a:prstGeom prst="rect">
-            <a:avLst/>
-          </a:prstGeom>
-          <a:noFill/>
-          <a:ln/>
-        </p:spPr>
-        <p:txBody>
-          <a:bodyPr wrap="square" rtlCol="0" anchor="ctr"/>
-          <a:lstStyle/>
-          <a:p>
-            <a:pPr indent="0" marL="0">
-              <a:lnSpc>
-                <a:spcPts val="1700"/>
-              </a:lnSpc>
-              <a:buNone/>
-            </a:pPr>
-            <a:r>
-              <a:rPr lang="en-US" sz="1200" dirty="0">
-                <a:solidFill>
-                  <a:srgbClr val="DBE6F7"/>
-                </a:solidFill>
-                <a:latin typeface="Calibri" pitchFamily="34" charset="0"/>
-                <a:ea typeface="Calibri" pitchFamily="34" charset="-122"/>
-                <a:cs typeface="Calibri" pitchFamily="34" charset="-120"/>
-              </a:rPr>
-              <a:t>A REAL scam robocall (FTC evidence, Whisper-transcribed) is intercepted mid-sentence with no hand-tuned trigger. Live Mic classifies the presenter's own voice via real speech-to-text. FICN model: 5/5 on held-out real note photos.</a:t>
-            </a:r>
-            <a:endParaRPr lang="en-US" sz="1200" dirty="0"/>
-          </a:p>
-        </p:txBody>
-      </p:sp>
-      <p:sp>
-        <p:nvSpPr>
-          <p:cNvPr id="13" name="Text 11"/>
+        </p:txBody>
+      </p:sp>
+      <p:sp>
+        <p:nvSpPr>
+          <p:cNvPr id="8" name="Text 4"/>
           <p:cNvSpPr/>
           <p:nvPr/>
         </p:nvSpPr>
@@ -4525,7 +5693,7 @@
       </p:sp>
       <p:sp>
         <p:nvSpPr>
-          <p:cNvPr id="14" name="Text 12"/>
+          <p:cNvPr id="9" name="Text 5"/>
           <p:cNvSpPr/>
           <p:nvPr/>
         </p:nvSpPr>
@@ -4627,7 +5795,7 @@
                 <a:ea typeface="Arial" pitchFamily="34" charset="-122"/>
                 <a:cs typeface="Arial" pitchFamily="34" charset="-120"/>
               </a:rPr>
-              <a:t>FICN Scanner — every phone becomes a detector</a:t>
+              <a:t>Scam Shield — stopping the scam mid-call</a:t>
             </a:r>
             <a:endParaRPr lang="en-US" sz="3600" dirty="0"/>
           </a:p>
@@ -4687,47 +5855,158 @@
             <a:r>
               <a:rPr lang="en-US" sz="1600" b="1" dirty="0">
                 <a:solidFill>
+                  <a:srgbClr val="22D3EE"/>
+                </a:solidFill>
+                <a:latin typeface="Calibri" pitchFamily="34" charset="0"/>
+                <a:ea typeface="Calibri" pitchFamily="34" charset="-122"/>
+                <a:cs typeface="Calibri" pitchFamily="34" charset="-120"/>
+              </a:rPr>
+              <a:t>How it works</a:t>
+            </a:r>
+            <a:endParaRPr lang="en-US" sz="1600" dirty="0"/>
+          </a:p>
+        </p:txBody>
+      </p:sp>
+      <p:sp>
+        <p:nvSpPr>
+          <p:cNvPr id="5" name="Text 3"/>
+          <p:cNvSpPr/>
+          <p:nvPr/>
+        </p:nvSpPr>
+        <p:spPr>
+          <a:xfrm>
+            <a:off x="822960" y="2103120"/>
+            <a:ext cx="6126480" cy="3931920"/>
+          </a:xfrm>
+          <a:prstGeom prst="rect">
+            <a:avLst/>
+          </a:prstGeom>
+          <a:noFill/>
+          <a:ln/>
+        </p:spPr>
+        <p:txBody>
+          <a:bodyPr wrap="square" rtlCol="0" anchor="ctr"/>
+          <a:lstStyle/>
+          <a:p>
+            <a:pPr indent="0" marL="0">
+              <a:lnSpc>
+                <a:spcPts val="2200"/>
+              </a:lnSpc>
+              <a:buNone/>
+            </a:pPr>
+            <a:r>
+              <a:rPr lang="en-US" sz="1400" dirty="0">
+                <a:solidFill>
+                  <a:srgbClr val="DBE6F7"/>
+                </a:solidFill>
+                <a:latin typeface="Calibri" pitchFamily="34" charset="0"/>
+                <a:ea typeface="Calibri" pitchFamily="34" charset="-122"/>
+                <a:cs typeface="Calibri" pitchFamily="34" charset="-120"/>
+              </a:rPr>
+              <a:t>Live transcript is scored against five behavioural signal categories drawn from I4C-documented scam playbooks:
+</a:t>
+            </a:r>
+            <a:endParaRPr lang="en-US" sz="1400" dirty="0"/>
+          </a:p>
+          <a:p>
+            <a:pPr indent="0" marL="0">
+              <a:lnSpc>
+                <a:spcPts val="2200"/>
+              </a:lnSpc>
+              <a:buNone/>
+            </a:pPr>
+            <a:r>
+              <a:rPr lang="en-US" sz="1400" dirty="0">
+                <a:solidFill>
+                  <a:srgbClr val="F8536B"/>
+                </a:solidFill>
+                <a:latin typeface="Calibri" pitchFamily="34" charset="0"/>
+                <a:ea typeface="Calibri" pitchFamily="34" charset="-122"/>
+                <a:cs typeface="Calibri" pitchFamily="34" charset="-120"/>
+              </a:rPr>
+              <a:t>1  Authority impersonation — “CBI officer”, “arrest warrant”
+</a:t>
+            </a:r>
+            <a:pPr indent="0" marL="0">
+              <a:lnSpc>
+                <a:spcPts val="2200"/>
+              </a:lnSpc>
+              <a:buNone/>
+            </a:pPr>
+            <a:r>
+              <a:rPr lang="en-US" sz="1400" dirty="0">
+                <a:solidFill>
+                  <a:srgbClr val="C084FC"/>
+                </a:solidFill>
+                <a:latin typeface="Calibri" pitchFamily="34" charset="0"/>
+                <a:ea typeface="Calibri" pitchFamily="34" charset="-122"/>
+                <a:cs typeface="Calibri" pitchFamily="34" charset="-120"/>
+              </a:rPr>
+              <a:t>2  Victim isolation — “do not disconnect”, “tell no one”
+</a:t>
+            </a:r>
+            <a:pPr indent="0" marL="0">
+              <a:lnSpc>
+                <a:spcPts val="2200"/>
+              </a:lnSpc>
+              <a:buNone/>
+            </a:pPr>
+            <a:r>
+              <a:rPr lang="en-US" sz="1400" dirty="0">
+                <a:solidFill>
+                  <a:srgbClr val="FBBF24"/>
+                </a:solidFill>
+                <a:latin typeface="Calibri" pitchFamily="34" charset="0"/>
+                <a:ea typeface="Calibri" pitchFamily="34" charset="-122"/>
+                <a:cs typeface="Calibri" pitchFamily="34" charset="-120"/>
+              </a:rPr>
+              <a:t>3  Urgency &amp; fear — “within 30 minutes”, “non-bailable”
+</a:t>
+            </a:r>
+            <a:pPr indent="0" marL="0">
+              <a:lnSpc>
+                <a:spcPts val="2200"/>
+              </a:lnSpc>
+              <a:buNone/>
+            </a:pPr>
+            <a:r>
+              <a:rPr lang="en-US" sz="1400" dirty="0">
+                <a:solidFill>
+                  <a:srgbClr val="22D3EE"/>
+                </a:solidFill>
+                <a:latin typeface="Calibri" pitchFamily="34" charset="0"/>
+                <a:ea typeface="Calibri" pitchFamily="34" charset="-122"/>
+                <a:cs typeface="Calibri" pitchFamily="34" charset="-120"/>
+              </a:rPr>
+              <a:t>4  Financial extraction — “safe account”, “RTGS immediately”
+</a:t>
+            </a:r>
+            <a:pPr indent="0" marL="0">
+              <a:lnSpc>
+                <a:spcPts val="2200"/>
+              </a:lnSpc>
+              <a:buNone/>
+            </a:pPr>
+            <a:r>
+              <a:rPr lang="en-US" sz="1400" dirty="0">
+                <a:solidFill>
                   <a:srgbClr val="34D399"/>
                 </a:solidFill>
                 <a:latin typeface="Calibri" pitchFamily="34" charset="0"/>
                 <a:ea typeface="Calibri" pitchFamily="34" charset="-122"/>
                 <a:cs typeface="Calibri" pitchFamily="34" charset="-120"/>
               </a:rPr>
-              <a:t>Seven-point RBI security-feature verification</a:t>
-            </a:r>
-            <a:endParaRPr lang="en-US" sz="1600" dirty="0"/>
-          </a:p>
-        </p:txBody>
-      </p:sp>
-      <p:sp>
-        <p:nvSpPr>
-          <p:cNvPr id="5" name="Text 3"/>
-          <p:cNvSpPr/>
-          <p:nvPr/>
-        </p:nvSpPr>
-        <p:spPr>
-          <a:xfrm>
-            <a:off x="822960" y="2103120"/>
-            <a:ext cx="6126480" cy="2377440"/>
-          </a:xfrm>
-          <a:prstGeom prst="rect">
-            <a:avLst/>
-          </a:prstGeom>
-          <a:noFill/>
-          <a:ln/>
-        </p:spPr>
-        <p:txBody>
-          <a:bodyPr wrap="square" rtlCol="0" anchor="ctr"/>
-          <a:lstStyle/>
-          <a:p>
+              <a:t>5  Identity harvesting — Aadhaar, OTP, net-banking access
+</a:t>
+            </a:r>
             <a:pPr indent="0" marL="0">
               <a:lnSpc>
-                <a:spcPts val="2400"/>
+                <a:spcPts val="2200"/>
               </a:lnSpc>
               <a:buNone/>
             </a:pPr>
             <a:r>
-              <a:rPr lang="en-US" sz="1450" dirty="0">
+              <a:rPr lang="en-US" sz="1400" dirty="0">
                 <a:solidFill>
                   <a:srgbClr val="DBE6F7"/>
                 </a:solidFill>
@@ -4735,169 +6014,7 @@
                 <a:ea typeface="Calibri" pitchFamily="34" charset="-122"/>
                 <a:cs typeface="Calibri" pitchFamily="34" charset="-120"/>
               </a:rPr>
-              <a:t>✓  Windowed colour-shift security thread</a:t>
-            </a:r>
-            <a:endParaRPr lang="en-US" sz="1450" dirty="0"/>
-          </a:p>
-          <a:p>
-            <a:pPr indent="0" marL="0">
-              <a:lnSpc>
-                <a:spcPts val="2400"/>
-              </a:lnSpc>
-              <a:buNone/>
-            </a:pPr>
-            <a:r>
-              <a:rPr lang="en-US" sz="1450" dirty="0">
-                <a:solidFill>
-                  <a:srgbClr val="DBE6F7"/>
-                </a:solidFill>
-                <a:latin typeface="Calibri" pitchFamily="34" charset="0"/>
-                <a:ea typeface="Calibri" pitchFamily="34" charset="-122"/>
-                <a:cs typeface="Calibri" pitchFamily="34" charset="-120"/>
-              </a:rPr>
-              <a:t>✓  Mahatma Gandhi watermark + electrotype</a:t>
-            </a:r>
-            <a:endParaRPr lang="en-US" sz="1450" dirty="0"/>
-          </a:p>
-          <a:p>
-            <a:pPr indent="0" marL="0">
-              <a:lnSpc>
-                <a:spcPts val="2400"/>
-              </a:lnSpc>
-              <a:buNone/>
-            </a:pPr>
-            <a:r>
-              <a:rPr lang="en-US" sz="1450" dirty="0">
-                <a:solidFill>
-                  <a:srgbClr val="DBE6F7"/>
-                </a:solidFill>
-                <a:latin typeface="Calibri" pitchFamily="34" charset="0"/>
-                <a:ea typeface="Calibri" pitchFamily="34" charset="-122"/>
-                <a:cs typeface="Calibri" pitchFamily="34" charset="-120"/>
-              </a:rPr>
-              <a:t>✓  Microlettering “RBI 500”</a:t>
-            </a:r>
-            <a:endParaRPr lang="en-US" sz="1450" dirty="0"/>
-          </a:p>
-          <a:p>
-            <a:pPr indent="0" marL="0">
-              <a:lnSpc>
-                <a:spcPts val="2400"/>
-              </a:lnSpc>
-              <a:buNone/>
-            </a:pPr>
-            <a:r>
-              <a:rPr lang="en-US" sz="1450" dirty="0">
-                <a:solidFill>
-                  <a:srgbClr val="DBE6F7"/>
-                </a:solidFill>
-                <a:latin typeface="Calibri" pitchFamily="34" charset="0"/>
-                <a:ea typeface="Calibri" pitchFamily="34" charset="-122"/>
-                <a:cs typeface="Calibri" pitchFamily="34" charset="-120"/>
-              </a:rPr>
-              <a:t>✓  Portrait intaglio relief (raised-ink signature)</a:t>
-            </a:r>
-            <a:endParaRPr lang="en-US" sz="1450" dirty="0"/>
-          </a:p>
-          <a:p>
-            <a:pPr indent="0" marL="0">
-              <a:lnSpc>
-                <a:spcPts val="2400"/>
-              </a:lnSpc>
-              <a:buNone/>
-            </a:pPr>
-            <a:r>
-              <a:rPr lang="en-US" sz="1450" dirty="0">
-                <a:solidFill>
-                  <a:srgbClr val="DBE6F7"/>
-                </a:solidFill>
-                <a:latin typeface="Calibri" pitchFamily="34" charset="0"/>
-                <a:ea typeface="Calibri" pitchFamily="34" charset="-122"/>
-                <a:cs typeface="Calibri" pitchFamily="34" charset="-120"/>
-              </a:rPr>
-              <a:t>✓  See-through register (₹ motif)</a:t>
-            </a:r>
-            <a:endParaRPr lang="en-US" sz="1450" dirty="0"/>
-          </a:p>
-          <a:p>
-            <a:pPr indent="0" marL="0">
-              <a:lnSpc>
-                <a:spcPts val="2400"/>
-              </a:lnSpc>
-              <a:buNone/>
-            </a:pPr>
-            <a:r>
-              <a:rPr lang="en-US" sz="1450" dirty="0">
-                <a:solidFill>
-                  <a:srgbClr val="DBE6F7"/>
-                </a:solidFill>
-                <a:latin typeface="Calibri" pitchFamily="34" charset="0"/>
-                <a:ea typeface="Calibri" pitchFamily="34" charset="-122"/>
-                <a:cs typeface="Calibri" pitchFamily="34" charset="-120"/>
-              </a:rPr>
-              <a:t>✓  Latent image &amp; colour-shift ink</a:t>
-            </a:r>
-            <a:endParaRPr lang="en-US" sz="1450" dirty="0"/>
-          </a:p>
-          <a:p>
-            <a:pPr indent="0" marL="0">
-              <a:lnSpc>
-                <a:spcPts val="2400"/>
-              </a:lnSpc>
-              <a:buNone/>
-            </a:pPr>
-            <a:r>
-              <a:rPr lang="en-US" sz="1450" dirty="0">
-                <a:solidFill>
-                  <a:srgbClr val="DBE6F7"/>
-                </a:solidFill>
-                <a:latin typeface="Calibri" pitchFamily="34" charset="0"/>
-                <a:ea typeface="Calibri" pitchFamily="34" charset="-122"/>
-                <a:cs typeface="Calibri" pitchFamily="34" charset="-120"/>
-              </a:rPr>
-              <a:t>✓  Serial-number font, checksum &amp; ascending pattern</a:t>
-            </a:r>
-            <a:endParaRPr lang="en-US" sz="1450" dirty="0"/>
-          </a:p>
-        </p:txBody>
-      </p:sp>
-      <p:sp>
-        <p:nvSpPr>
-          <p:cNvPr id="6" name="Text 4"/>
-          <p:cNvSpPr/>
-          <p:nvPr/>
-        </p:nvSpPr>
-        <p:spPr>
-          <a:xfrm>
-            <a:off x="822960" y="4709160"/>
-            <a:ext cx="6126480" cy="1280160"/>
-          </a:xfrm>
-          <a:prstGeom prst="rect">
-            <a:avLst/>
-          </a:prstGeom>
-          <a:noFill/>
-          <a:ln/>
-        </p:spPr>
-        <p:txBody>
-          <a:bodyPr wrap="square" rtlCol="0" anchor="ctr"/>
-          <a:lstStyle/>
-          <a:p>
-            <a:pPr indent="0" marL="0">
-              <a:lnSpc>
-                <a:spcPts val="2100"/>
-              </a:lnSpc>
-              <a:buNone/>
-            </a:pPr>
-            <a:r>
-              <a:rPr lang="en-US" sz="1400" i="1" dirty="0">
-                <a:solidFill>
-                  <a:srgbClr val="22D3EE"/>
-                </a:solidFill>
-                <a:latin typeface="Calibri" pitchFamily="34" charset="0"/>
-                <a:ea typeface="Calibri" pitchFamily="34" charset="-122"/>
-                <a:cs typeface="Calibri" pitchFamily="34" charset="-120"/>
-              </a:rPr>
-              <a:t>The differentiator: every scanned serial is cross-checked against the national FICN seizure registry — linking a note in a kirana store to a known smuggling corridor batch in real time.</a:t>
+              <a:t>Weighted signal fusion means no single keyword can trigger a false alarm — a genuine bank call scores near zero. Verdicts are explainable, phrase by phrase.</a:t>
             </a:r>
             <a:endParaRPr lang="en-US" sz="1400" dirty="0"/>
           </a:p>
@@ -4905,7 +6022,7 @@
       </p:sp>
       <p:sp>
         <p:nvSpPr>
-          <p:cNvPr id="7" name="Shape 5"/>
+          <p:cNvPr id="6" name="Shape 4"/>
           <p:cNvSpPr/>
           <p:nvPr/>
         </p:nvSpPr>
@@ -4920,7 +6037,7 @@
             </a:avLst>
           </a:prstGeom>
           <a:solidFill>
-            <a:srgbClr val="1A0F14"/>
+            <a:srgbClr val="1A0F1A"/>
           </a:solidFill>
           <a:ln w="9525">
             <a:solidFill>
@@ -4932,14 +6049,14 @@
       </p:sp>
       <p:sp>
         <p:nvSpPr>
-          <p:cNvPr id="8" name="Text 6"/>
+          <p:cNvPr id="7" name="Text 5"/>
           <p:cNvSpPr/>
           <p:nvPr/>
         </p:nvSpPr>
         <p:spPr>
           <a:xfrm>
             <a:off x="7726680" y="1691640"/>
-            <a:ext cx="3657600" cy="457200"/>
+            <a:ext cx="3657600" cy="640080"/>
           </a:xfrm>
           <a:prstGeom prst="rect">
             <a:avLst/>
@@ -4963,7 +6080,7 @@
                 <a:ea typeface="Arial" pitchFamily="34" charset="-122"/>
                 <a:cs typeface="Arial" pitchFamily="34" charset="-120"/>
               </a:rPr>
-              <a:t>🚨 COUNTERFEIT DETECTED</a:t>
+              <a:t>🚨 DIGITAL ARREST SCAM DETECTED</a:t>
             </a:r>
             <a:endParaRPr lang="en-US" sz="1600" dirty="0"/>
           </a:p>
@@ -4971,63 +6088,130 @@
       </p:sp>
       <p:sp>
         <p:nvSpPr>
+          <p:cNvPr id="8" name="Text 6"/>
+          <p:cNvSpPr/>
+          <p:nvPr/>
+        </p:nvSpPr>
+        <p:spPr>
+          <a:xfrm>
+            <a:off x="7726680" y="2377440"/>
+            <a:ext cx="3657600" cy="731520"/>
+          </a:xfrm>
+          <a:prstGeom prst="rect">
+            <a:avLst/>
+          </a:prstGeom>
+          <a:noFill/>
+          <a:ln/>
+        </p:spPr>
+        <p:txBody>
+          <a:bodyPr wrap="square" rtlCol="0" anchor="ctr"/>
+          <a:lstStyle/>
+          <a:p>
+            <a:pPr indent="0" marL="0">
+              <a:buNone/>
+            </a:pPr>
+            <a:r>
+              <a:rPr lang="en-US" sz="1300" dirty="0">
+                <a:solidFill>
+                  <a:srgbClr val="DBE6F7"/>
+                </a:solidFill>
+                <a:latin typeface="Calibri" pitchFamily="34" charset="0"/>
+                <a:ea typeface="Calibri" pitchFamily="34" charset="-122"/>
+                <a:cs typeface="Calibri" pitchFamily="34" charset="-120"/>
+              </a:rPr>
+              <a:t>Risk 97/100 · verdict in &lt;2s</a:t>
+            </a:r>
+            <a:endParaRPr lang="en-US" sz="1300" dirty="0"/>
+          </a:p>
+          <a:p>
+            <a:pPr indent="0" marL="0">
+              <a:buNone/>
+            </a:pPr>
+            <a:r>
+              <a:rPr lang="en-US" sz="1300" dirty="0">
+                <a:solidFill>
+                  <a:srgbClr val="DBE6F7"/>
+                </a:solidFill>
+                <a:latin typeface="Calibri" pitchFamily="34" charset="0"/>
+                <a:ea typeface="Calibri" pitchFamily="34" charset="-122"/>
+                <a:cs typeface="Calibri" pitchFamily="34" charset="-120"/>
+              </a:rPr>
+              <a:t>Victim alerted before the transfer</a:t>
+            </a:r>
+            <a:endParaRPr lang="en-US" sz="1300" dirty="0"/>
+          </a:p>
+        </p:txBody>
+      </p:sp>
+      <p:sp>
+        <p:nvSpPr>
           <p:cNvPr id="9" name="Text 7"/>
           <p:cNvSpPr/>
           <p:nvPr/>
         </p:nvSpPr>
         <p:spPr>
           <a:xfrm>
-            <a:off x="7726680" y="2194560"/>
-            <a:ext cx="3657600" cy="1280160"/>
-          </a:xfrm>
-          <a:prstGeom prst="rect">
-            <a:avLst/>
-          </a:prstGeom>
-          <a:noFill/>
-          <a:ln/>
-        </p:spPr>
-        <p:txBody>
-          <a:bodyPr wrap="square" rtlCol="0" anchor="ctr"/>
-          <a:lstStyle/>
-          <a:p>
-            <a:pPr indent="0" marL="0">
-              <a:lnSpc>
-                <a:spcPts val="1900"/>
-              </a:lnSpc>
-              <a:buNone/>
-            </a:pPr>
-            <a:r>
-              <a:rPr lang="en-US" sz="1250" dirty="0">
-                <a:solidFill>
-                  <a:srgbClr val="DBE6F7"/>
-                </a:solidFill>
-                <a:latin typeface="Calibri" pitchFamily="34" charset="0"/>
-                <a:ea typeface="Calibri" pitchFamily="34" charset="-122"/>
-                <a:cs typeface="Calibri" pitchFamily="34" charset="-120"/>
-              </a:rPr>
-              <a:t>Authenticity 14.6% · 6/7 features failed</a:t>
-            </a:r>
-            <a:endParaRPr lang="en-US" sz="1250" dirty="0"/>
-          </a:p>
-          <a:p>
-            <a:pPr indent="0" marL="0">
-              <a:lnSpc>
-                <a:spcPts val="1900"/>
-              </a:lnSpc>
-              <a:buNone/>
-            </a:pPr>
-            <a:r>
-              <a:rPr lang="en-US" sz="1250" dirty="0">
-                <a:solidFill>
-                  <a:srgbClr val="DBE6F7"/>
-                </a:solidFill>
-                <a:latin typeface="Calibri" pitchFamily="34" charset="0"/>
-                <a:ea typeface="Calibri" pitchFamily="34" charset="-122"/>
-                <a:cs typeface="Calibri" pitchFamily="34" charset="-120"/>
-              </a:rPr>
-              <a:t>Serial matched to seized batch #F-118 (Malda corridor) · NCRB seizure report pre-filled</a:t>
-            </a:r>
-            <a:endParaRPr lang="en-US" sz="1250" dirty="0"/>
+            <a:off x="7726680" y="3063240"/>
+            <a:ext cx="3657600" cy="548640"/>
+          </a:xfrm>
+          <a:prstGeom prst="rect">
+            <a:avLst/>
+          </a:prstGeom>
+          <a:noFill/>
+          <a:ln/>
+        </p:spPr>
+        <p:txBody>
+          <a:bodyPr wrap="square" rtlCol="0" anchor="ctr"/>
+          <a:lstStyle/>
+          <a:p>
+            <a:pPr indent="0" marL="0">
+              <a:buNone/>
+            </a:pPr>
+            <a:r>
+              <a:rPr lang="en-US" sz="1100" dirty="0">
+                <a:solidFill>
+                  <a:srgbClr val="8CA0C4"/>
+                </a:solidFill>
+                <a:latin typeface="Calibri" pitchFamily="34" charset="0"/>
+                <a:ea typeface="Calibri" pitchFamily="34" charset="-122"/>
+                <a:cs typeface="Calibri" pitchFamily="34" charset="-120"/>
+              </a:rPr>
+              <a:t>✓ Victim device push-alert</a:t>
+            </a:r>
+            <a:endParaRPr lang="en-US" sz="1100" dirty="0"/>
+          </a:p>
+          <a:p>
+            <a:pPr indent="0" marL="0">
+              <a:buNone/>
+            </a:pPr>
+            <a:r>
+              <a:rPr lang="en-US" sz="1100" dirty="0">
+                <a:solidFill>
+                  <a:srgbClr val="8CA0C4"/>
+                </a:solidFill>
+                <a:latin typeface="Calibri" pitchFamily="34" charset="0"/>
+                <a:ea typeface="Calibri" pitchFamily="34" charset="-122"/>
+                <a:cs typeface="Calibri" pitchFamily="34" charset="-120"/>
+              </a:rPr>
+              <a:t>✓ Telecom spoof-block request</a:t>
+            </a:r>
+            <a:endParaRPr lang="en-US" sz="1100" dirty="0"/>
+          </a:p>
+          <a:p>
+            <a:pPr indent="0" marL="0">
+              <a:buNone/>
+            </a:pPr>
+            <a:r>
+              <a:rPr lang="en-US" sz="1100" dirty="0">
+                <a:solidFill>
+                  <a:srgbClr val="8CA0C4"/>
+                </a:solidFill>
+                <a:latin typeface="Calibri" pitchFamily="34" charset="0"/>
+                <a:ea typeface="Calibri" pitchFamily="34" charset="-122"/>
+                <a:cs typeface="Calibri" pitchFamily="34" charset="-120"/>
+              </a:rPr>
+              <a:t>✓ MHA / I4C report auto-generated</a:t>
+            </a:r>
+            <a:endParaRPr lang="en-US" sz="1100" dirty="0"/>
           </a:p>
         </p:txBody>
       </p:sp>
@@ -5085,13 +6269,13 @@
             <a:r>
               <a:rPr lang="en-US" sz="1400" b="1" dirty="0">
                 <a:solidFill>
-                  <a:srgbClr val="34D399"/>
-                </a:solidFill>
-                <a:latin typeface="Calibri" pitchFamily="34" charset="0"/>
-                <a:ea typeface="Calibri" pitchFamily="34" charset="-122"/>
-                <a:cs typeface="Calibri" pitchFamily="34" charset="-120"/>
-              </a:rPr>
-              <a:t>Deploys on</a:t>
+                  <a:srgbClr val="22D3EE"/>
+                </a:solidFill>
+                <a:latin typeface="Calibri" pitchFamily="34" charset="0"/>
+                <a:ea typeface="Calibri" pitchFamily="34" charset="-122"/>
+                <a:cs typeface="Calibri" pitchFamily="34" charset="-120"/>
+              </a:rPr>
+              <a:t>Real, not staged</a:t>
             </a:r>
             <a:endParaRPr lang="en-US" sz="1400" dirty="0"/>
           </a:p>
@@ -5120,12 +6304,12 @@
           <a:p>
             <a:pPr indent="0" marL="0">
               <a:lnSpc>
-                <a:spcPts val="1900"/>
+                <a:spcPts val="1700"/>
               </a:lnSpc>
               <a:buNone/>
             </a:pPr>
             <a:r>
-              <a:rPr lang="en-US" sz="1250" dirty="0">
+              <a:rPr lang="en-US" sz="1200" dirty="0">
                 <a:solidFill>
                   <a:srgbClr val="DBE6F7"/>
                 </a:solidFill>
@@ -5133,9 +6317,9 @@
                 <a:ea typeface="Calibri" pitchFamily="34" charset="-122"/>
                 <a:cs typeface="Calibri" pitchFamily="34" charset="-120"/>
               </a:rPr>
-              <a:t>Smartphone cameras · bank counting machines · PoS terminals — 3-second verdicts for tellers, merchants and field officers, no new hardware</a:t>
-            </a:r>
-            <a:endParaRPr lang="en-US" sz="1250" dirty="0"/>
+              <a:t>A REAL scam robocall (FTC evidence, Whisper-transcribed) is intercepted mid-sentence with no hand-tuned trigger. Live Mic classifies the presenter's own voice via real speech-to-text. FICN model: 5/5 on held-out real note photos.</a:t>
+            </a:r>
+            <a:endParaRPr lang="en-US" sz="1200" dirty="0"/>
           </a:p>
         </p:txBody>
       </p:sp>
@@ -5282,7 +6466,7 @@
                 <a:ea typeface="Arial" pitchFamily="34" charset="-122"/>
                 <a:cs typeface="Arial" pitchFamily="34" charset="-120"/>
               </a:rPr>
-              <a:t>Network Intel — from 12 FIRs to one campaign</a:t>
+              <a:t>FICN Scanner — every phone becomes a detector</a:t>
             </a:r>
             <a:endParaRPr lang="en-US" sz="3600" dirty="0"/>
           </a:p>
@@ -5342,13 +6526,13 @@
             <a:r>
               <a:rPr lang="en-US" sz="1600" b="1" dirty="0">
                 <a:solidFill>
-                  <a:srgbClr val="F8536B"/>
-                </a:solidFill>
-                <a:latin typeface="Calibri" pitchFamily="34" charset="0"/>
-                <a:ea typeface="Calibri" pitchFamily="34" charset="-122"/>
-                <a:cs typeface="Calibri" pitchFamily="34" charset="-120"/>
-              </a:rPr>
-              <a:t>Graph AI over fused intelligence</a:t>
+                  <a:srgbClr val="34D399"/>
+                </a:solidFill>
+                <a:latin typeface="Calibri" pitchFamily="34" charset="0"/>
+                <a:ea typeface="Calibri" pitchFamily="34" charset="-122"/>
+                <a:cs typeface="Calibri" pitchFamily="34" charset="-120"/>
+              </a:rPr>
+              <a:t>Seven-point RBI security-feature verification</a:t>
             </a:r>
             <a:endParaRPr lang="en-US" sz="1600" dirty="0"/>
           </a:p>
@@ -5363,7 +6547,7 @@
         <p:spPr>
           <a:xfrm>
             <a:off x="822960" y="2103120"/>
-            <a:ext cx="6126480" cy="3840480"/>
+            <a:ext cx="6126480" cy="2377440"/>
           </a:xfrm>
           <a:prstGeom prst="rect">
             <a:avLst/>
@@ -5377,7 +6561,7 @@
           <a:p>
             <a:pPr indent="0" marL="0">
               <a:lnSpc>
-                <a:spcPts val="2300"/>
+                <a:spcPts val="2400"/>
               </a:lnSpc>
               <a:buNone/>
             </a:pPr>
@@ -5390,23 +6574,34 @@
                 <a:ea typeface="Calibri" pitchFamily="34" charset="-122"/>
                 <a:cs typeface="Calibri" pitchFamily="34" charset="-120"/>
               </a:rPr>
-              <a:t>Entity graph fuses victim reports (I4C portal), telco CDR metadata, bank account-opening device fingerprints and account linkages. Community detection + temporal correlation expose what per-FIR investigation never sees:</a:t>
+              <a:t>✓  Windowed colour-shift security thread</a:t>
             </a:r>
             <a:endParaRPr lang="en-US" sz="1450" dirty="0"/>
           </a:p>
           <a:p>
             <a:pPr indent="0" marL="0">
               <a:lnSpc>
-                <a:spcPts val="2300"/>
+                <a:spcPts val="2400"/>
               </a:lnSpc>
               <a:buNone/>
             </a:pPr>
+            <a:r>
+              <a:rPr lang="en-US" sz="1450" dirty="0">
+                <a:solidFill>
+                  <a:srgbClr val="DBE6F7"/>
+                </a:solidFill>
+                <a:latin typeface="Calibri" pitchFamily="34" charset="0"/>
+                <a:ea typeface="Calibri" pitchFamily="34" charset="-122"/>
+                <a:cs typeface="Calibri" pitchFamily="34" charset="-120"/>
+              </a:rPr>
+              <a:t>✓  Mahatma Gandhi watermark + electrotype</a:t>
+            </a:r>
             <a:endParaRPr lang="en-US" sz="1450" dirty="0"/>
           </a:p>
           <a:p>
             <a:pPr indent="0" marL="0">
               <a:lnSpc>
-                <a:spcPts val="2300"/>
+                <a:spcPts val="2400"/>
               </a:lnSpc>
               <a:buNone/>
             </a:pPr>
@@ -5419,30 +6614,152 @@
                 <a:ea typeface="Calibri" pitchFamily="34" charset="-122"/>
                 <a:cs typeface="Calibri" pitchFamily="34" charset="-120"/>
               </a:rPr>
-              <a:t>12 “unrelated” victim reports across 7 states  →  one coordinated ring, run from a cross-border compound, routing ₹4.2 Cr through 6 mule accounts into crypto off-ramps and shell firms — confirmed 31 hours after the first report, at 94% confidence.</a:t>
+              <a:t>✓  Microlettering “RBI 500”</a:t>
             </a:r>
             <a:endParaRPr lang="en-US" sz="1450" dirty="0"/>
           </a:p>
-        </p:txBody>
-      </p:sp>
-      <p:sp>
-        <p:nvSpPr>
-          <p:cNvPr id="6" name="Shape 4"/>
+          <a:p>
+            <a:pPr indent="0" marL="0">
+              <a:lnSpc>
+                <a:spcPts val="2400"/>
+              </a:lnSpc>
+              <a:buNone/>
+            </a:pPr>
+            <a:r>
+              <a:rPr lang="en-US" sz="1450" dirty="0">
+                <a:solidFill>
+                  <a:srgbClr val="DBE6F7"/>
+                </a:solidFill>
+                <a:latin typeface="Calibri" pitchFamily="34" charset="0"/>
+                <a:ea typeface="Calibri" pitchFamily="34" charset="-122"/>
+                <a:cs typeface="Calibri" pitchFamily="34" charset="-120"/>
+              </a:rPr>
+              <a:t>✓  Portrait intaglio relief (raised-ink signature)</a:t>
+            </a:r>
+            <a:endParaRPr lang="en-US" sz="1450" dirty="0"/>
+          </a:p>
+          <a:p>
+            <a:pPr indent="0" marL="0">
+              <a:lnSpc>
+                <a:spcPts val="2400"/>
+              </a:lnSpc>
+              <a:buNone/>
+            </a:pPr>
+            <a:r>
+              <a:rPr lang="en-US" sz="1450" dirty="0">
+                <a:solidFill>
+                  <a:srgbClr val="DBE6F7"/>
+                </a:solidFill>
+                <a:latin typeface="Calibri" pitchFamily="34" charset="0"/>
+                <a:ea typeface="Calibri" pitchFamily="34" charset="-122"/>
+                <a:cs typeface="Calibri" pitchFamily="34" charset="-120"/>
+              </a:rPr>
+              <a:t>✓  See-through register (₹ motif)</a:t>
+            </a:r>
+            <a:endParaRPr lang="en-US" sz="1450" dirty="0"/>
+          </a:p>
+          <a:p>
+            <a:pPr indent="0" marL="0">
+              <a:lnSpc>
+                <a:spcPts val="2400"/>
+              </a:lnSpc>
+              <a:buNone/>
+            </a:pPr>
+            <a:r>
+              <a:rPr lang="en-US" sz="1450" dirty="0">
+                <a:solidFill>
+                  <a:srgbClr val="DBE6F7"/>
+                </a:solidFill>
+                <a:latin typeface="Calibri" pitchFamily="34" charset="0"/>
+                <a:ea typeface="Calibri" pitchFamily="34" charset="-122"/>
+                <a:cs typeface="Calibri" pitchFamily="34" charset="-120"/>
+              </a:rPr>
+              <a:t>✓  Latent image &amp; colour-shift ink</a:t>
+            </a:r>
+            <a:endParaRPr lang="en-US" sz="1450" dirty="0"/>
+          </a:p>
+          <a:p>
+            <a:pPr indent="0" marL="0">
+              <a:lnSpc>
+                <a:spcPts val="2400"/>
+              </a:lnSpc>
+              <a:buNone/>
+            </a:pPr>
+            <a:r>
+              <a:rPr lang="en-US" sz="1450" dirty="0">
+                <a:solidFill>
+                  <a:srgbClr val="DBE6F7"/>
+                </a:solidFill>
+                <a:latin typeface="Calibri" pitchFamily="34" charset="0"/>
+                <a:ea typeface="Calibri" pitchFamily="34" charset="-122"/>
+                <a:cs typeface="Calibri" pitchFamily="34" charset="-120"/>
+              </a:rPr>
+              <a:t>✓  Serial-number font, checksum &amp; ascending pattern</a:t>
+            </a:r>
+            <a:endParaRPr lang="en-US" sz="1450" dirty="0"/>
+          </a:p>
+        </p:txBody>
+      </p:sp>
+      <p:sp>
+        <p:nvSpPr>
+          <p:cNvPr id="6" name="Text 4"/>
+          <p:cNvSpPr/>
+          <p:nvPr/>
+        </p:nvSpPr>
+        <p:spPr>
+          <a:xfrm>
+            <a:off x="822960" y="4709160"/>
+            <a:ext cx="6126480" cy="1280160"/>
+          </a:xfrm>
+          <a:prstGeom prst="rect">
+            <a:avLst/>
+          </a:prstGeom>
+          <a:noFill/>
+          <a:ln/>
+        </p:spPr>
+        <p:txBody>
+          <a:bodyPr wrap="square" rtlCol="0" anchor="ctr"/>
+          <a:lstStyle/>
+          <a:p>
+            <a:pPr indent="0" marL="0">
+              <a:lnSpc>
+                <a:spcPts val="2100"/>
+              </a:lnSpc>
+              <a:buNone/>
+            </a:pPr>
+            <a:r>
+              <a:rPr lang="en-US" sz="1400" i="1" dirty="0">
+                <a:solidFill>
+                  <a:srgbClr val="22D3EE"/>
+                </a:solidFill>
+                <a:latin typeface="Calibri" pitchFamily="34" charset="0"/>
+                <a:ea typeface="Calibri" pitchFamily="34" charset="-122"/>
+                <a:cs typeface="Calibri" pitchFamily="34" charset="-120"/>
+              </a:rPr>
+              <a:t>The differentiator: every scanned serial is cross-checked against the national FICN seizure registry — linking a note in a kirana store to a known smuggling corridor batch in real time.</a:t>
+            </a:r>
+            <a:endParaRPr lang="en-US" sz="1400" dirty="0"/>
+          </a:p>
+        </p:txBody>
+      </p:sp>
+      <p:sp>
+        <p:nvSpPr>
+          <p:cNvPr id="7" name="Shape 5"/>
           <p:cNvSpPr/>
           <p:nvPr/>
         </p:nvSpPr>
         <p:spPr>
           <a:xfrm>
             <a:off x="7498080" y="1463040"/>
-            <a:ext cx="4114800" cy="2468880"/>
+            <a:ext cx="4114800" cy="2194560"/>
           </a:xfrm>
           <a:prstGeom prst="roundRect">
             <a:avLst>
-              <a:gd name="adj" fmla="val 2963"/>
+              <a:gd name="adj" fmla="val 3333"/>
             </a:avLst>
           </a:prstGeom>
           <a:solidFill>
-            <a:srgbClr val="10141F"/>
+            <a:srgbClr val="1A0F14"/>
           </a:solidFill>
           <a:ln w="9525">
             <a:solidFill>
@@ -5454,14 +6771,14 @@
       </p:sp>
       <p:sp>
         <p:nvSpPr>
-          <p:cNvPr id="7" name="Text 5"/>
+          <p:cNvPr id="8" name="Text 6"/>
           <p:cNvSpPr/>
           <p:nvPr/>
         </p:nvSpPr>
         <p:spPr>
           <a:xfrm>
             <a:off x="7726680" y="1691640"/>
-            <a:ext cx="3657600" cy="411480"/>
+            <a:ext cx="3657600" cy="457200"/>
           </a:xfrm>
           <a:prstGeom prst="rect">
             <a:avLst/>
@@ -5479,13 +6796,13 @@
             <a:r>
               <a:rPr lang="en-US" sz="1600" b="1" dirty="0">
                 <a:solidFill>
-                  <a:srgbClr val="FBBF24"/>
+                  <a:srgbClr val="F8536B"/>
                 </a:solidFill>
                 <a:latin typeface="Arial" pitchFamily="34" charset="0"/>
                 <a:ea typeface="Arial" pitchFamily="34" charset="-122"/>
                 <a:cs typeface="Arial" pitchFamily="34" charset="-120"/>
               </a:rPr>
-              <a:t>⚖ Court-ready by design</a:t>
+              <a:t>🚨 COUNTERFEIT DETECTED</a:t>
             </a:r>
             <a:endParaRPr lang="en-US" sz="1600" dirty="0"/>
           </a:p>
@@ -5493,14 +6810,14 @@
       </p:sp>
       <p:sp>
         <p:nvSpPr>
-          <p:cNvPr id="8" name="Text 6"/>
-          <p:cNvSpPr/>
-          <p:nvPr/>
-        </p:nvSpPr>
-        <p:spPr>
-          <a:xfrm>
-            <a:off x="7726680" y="2148840"/>
-            <a:ext cx="3657600" cy="1645920"/>
+          <p:cNvPr id="9" name="Text 7"/>
+          <p:cNvSpPr/>
+          <p:nvPr/>
+        </p:nvSpPr>
+        <p:spPr>
+          <a:xfrm>
+            <a:off x="7726680" y="2194560"/>
+            <a:ext cx="3657600" cy="1280160"/>
           </a:xfrm>
           <a:prstGeom prst="rect">
             <a:avLst/>
@@ -5527,26 +6844,46 @@
                 <a:ea typeface="Calibri" pitchFamily="34" charset="-122"/>
                 <a:cs typeface="Calibri" pitchFamily="34" charset="-120"/>
               </a:rPr>
-              <a:t>Evidence packages are SHA-256 integrity-sealed and timestamped, with chain-of-custody metadata — built for legal admissibility, not just dashboards.</a:t>
+              <a:t>Authenticity 14.6% · 6/7 features failed</a:t>
             </a:r>
             <a:endParaRPr lang="en-US" sz="1250" dirty="0"/>
           </a:p>
-        </p:txBody>
-      </p:sp>
-      <p:sp>
-        <p:nvSpPr>
-          <p:cNvPr id="9" name="Shape 7"/>
-          <p:cNvSpPr/>
-          <p:nvPr/>
-        </p:nvSpPr>
-        <p:spPr>
-          <a:xfrm>
-            <a:off x="7498080" y="4206240"/>
-            <a:ext cx="4114800" cy="2011680"/>
+          <a:p>
+            <a:pPr indent="0" marL="0">
+              <a:lnSpc>
+                <a:spcPts val="1900"/>
+              </a:lnSpc>
+              <a:buNone/>
+            </a:pPr>
+            <a:r>
+              <a:rPr lang="en-US" sz="1250" dirty="0">
+                <a:solidFill>
+                  <a:srgbClr val="DBE6F7"/>
+                </a:solidFill>
+                <a:latin typeface="Calibri" pitchFamily="34" charset="0"/>
+                <a:ea typeface="Calibri" pitchFamily="34" charset="-122"/>
+                <a:cs typeface="Calibri" pitchFamily="34" charset="-120"/>
+              </a:rPr>
+              <a:t>Serial matched to seized batch #F-118 (Malda corridor) · NCRB seizure report pre-filled</a:t>
+            </a:r>
+            <a:endParaRPr lang="en-US" sz="1250" dirty="0"/>
+          </a:p>
+        </p:txBody>
+      </p:sp>
+      <p:sp>
+        <p:nvSpPr>
+          <p:cNvPr id="10" name="Shape 8"/>
+          <p:cNvSpPr/>
+          <p:nvPr/>
+        </p:nvSpPr>
+        <p:spPr>
+          <a:xfrm>
+            <a:off x="7498080" y="3931920"/>
+            <a:ext cx="4114800" cy="2286000"/>
           </a:xfrm>
           <a:prstGeom prst="roundRect">
             <a:avLst>
-              <a:gd name="adj" fmla="val 3636"/>
+              <a:gd name="adj" fmla="val 3200"/>
             </a:avLst>
           </a:prstGeom>
           <a:solidFill>
@@ -5562,13 +6899,13 @@
       </p:sp>
       <p:sp>
         <p:nvSpPr>
-          <p:cNvPr id="10" name="Text 8"/>
-          <p:cNvSpPr/>
-          <p:nvPr/>
-        </p:nvSpPr>
-        <p:spPr>
-          <a:xfrm>
-            <a:off x="7726680" y="4389120"/>
+          <p:cNvPr id="11" name="Text 9"/>
+          <p:cNvSpPr/>
+          <p:nvPr/>
+        </p:nvSpPr>
+        <p:spPr>
+          <a:xfrm>
+            <a:off x="7726680" y="4114800"/>
             <a:ext cx="3657600" cy="365760"/>
           </a:xfrm>
           <a:prstGeom prst="rect">
@@ -5587,13 +6924,13 @@
             <a:r>
               <a:rPr lang="en-US" sz="1400" b="1" dirty="0">
                 <a:solidFill>
-                  <a:srgbClr val="F8536B"/>
-                </a:solidFill>
-                <a:latin typeface="Calibri" pitchFamily="34" charset="0"/>
-                <a:ea typeface="Calibri" pitchFamily="34" charset="-122"/>
-                <a:cs typeface="Calibri" pitchFamily="34" charset="-120"/>
-              </a:rPr>
-              <a:t>One-click actions</a:t>
+                  <a:srgbClr val="34D399"/>
+                </a:solidFill>
+                <a:latin typeface="Calibri" pitchFamily="34" charset="0"/>
+                <a:ea typeface="Calibri" pitchFamily="34" charset="-122"/>
+                <a:cs typeface="Calibri" pitchFamily="34" charset="-120"/>
+              </a:rPr>
+              <a:t>Deploys on</a:t>
             </a:r>
             <a:endParaRPr lang="en-US" sz="1400" dirty="0"/>
           </a:p>
@@ -5601,14 +6938,14 @@
       </p:sp>
       <p:sp>
         <p:nvSpPr>
-          <p:cNvPr id="11" name="Text 9"/>
-          <p:cNvSpPr/>
-          <p:nvPr/>
-        </p:nvSpPr>
-        <p:spPr>
-          <a:xfrm>
-            <a:off x="7726680" y="4800600"/>
-            <a:ext cx="3657600" cy="1280160"/>
+          <p:cNvPr id="12" name="Text 10"/>
+          <p:cNvSpPr/>
+          <p:nvPr/>
+        </p:nvSpPr>
+        <p:spPr>
+          <a:xfrm>
+            <a:off x="7726680" y="4526280"/>
+            <a:ext cx="3657600" cy="1554480"/>
           </a:xfrm>
           <a:prstGeom prst="rect">
             <a:avLst/>
@@ -5622,7 +6959,7 @@
           <a:p>
             <a:pPr indent="0" marL="0">
               <a:lnSpc>
-                <a:spcPts val="2000"/>
+                <a:spcPts val="1900"/>
               </a:lnSpc>
               <a:buNone/>
             </a:pPr>
@@ -5635,55 +6972,15 @@
                 <a:ea typeface="Calibri" pitchFamily="34" charset="-122"/>
                 <a:cs typeface="Calibri" pitchFamily="34" charset="-120"/>
               </a:rPr>
-              <a:t>✓ Freeze requests for all mule accounts</a:t>
+              <a:t>Smartphone cameras · bank counting machines · PoS terminals — 3-second verdicts for tellers, merchants and field officers, no new hardware</a:t>
             </a:r>
             <a:endParaRPr lang="en-US" sz="1250" dirty="0"/>
           </a:p>
-          <a:p>
-            <a:pPr indent="0" marL="0">
-              <a:lnSpc>
-                <a:spcPts val="2000"/>
-              </a:lnSpc>
-              <a:buNone/>
-            </a:pPr>
-            <a:r>
-              <a:rPr lang="en-US" sz="1250" dirty="0">
-                <a:solidFill>
-                  <a:srgbClr val="DBE6F7"/>
-                </a:solidFill>
-                <a:latin typeface="Calibri" pitchFamily="34" charset="0"/>
-                <a:ea typeface="Calibri" pitchFamily="34" charset="-122"/>
-                <a:cs typeface="Calibri" pitchFamily="34" charset="-120"/>
-              </a:rPr>
-              <a:t>✓ Inter-state alerts to 7 cyber cells</a:t>
-            </a:r>
-            <a:endParaRPr lang="en-US" sz="1250" dirty="0"/>
-          </a:p>
-          <a:p>
-            <a:pPr indent="0" marL="0">
-              <a:lnSpc>
-                <a:spcPts val="2000"/>
-              </a:lnSpc>
-              <a:buNone/>
-            </a:pPr>
-            <a:r>
-              <a:rPr lang="en-US" sz="1250" dirty="0">
-                <a:solidFill>
-                  <a:srgbClr val="DBE6F7"/>
-                </a:solidFill>
-                <a:latin typeface="Calibri" pitchFamily="34" charset="0"/>
-                <a:ea typeface="Calibri" pitchFamily="34" charset="-122"/>
-                <a:cs typeface="Calibri" pitchFamily="34" charset="-120"/>
-              </a:rPr>
-              <a:t>✓ VoIP block takedown request to DoT</a:t>
-            </a:r>
-            <a:endParaRPr lang="en-US" sz="1250" dirty="0"/>
-          </a:p>
-        </p:txBody>
-      </p:sp>
-      <p:sp>
-        <p:nvSpPr>
-          <p:cNvPr id="12" name="Text 10"/>
+        </p:txBody>
+      </p:sp>
+      <p:sp>
+        <p:nvSpPr>
+          <p:cNvPr id="13" name="Text 11"/>
           <p:cNvSpPr/>
           <p:nvPr/>
         </p:nvSpPr>
@@ -5722,7 +7019,7 @@
       </p:sp>
       <p:sp>
         <p:nvSpPr>
-          <p:cNvPr id="13" name="Text 11"/>
+          <p:cNvPr id="14" name="Text 12"/>
           <p:cNvSpPr/>
           <p:nvPr/>
         </p:nvSpPr>
@@ -5816,7 +7113,7 @@
               <a:buNone/>
             </a:pPr>
             <a:r>
-              <a:rPr lang="en-US" sz="3800" b="1" dirty="0">
+              <a:rPr lang="en-US" sz="3600" b="1" dirty="0">
                 <a:solidFill>
                   <a:srgbClr val="FFFFFF"/>
                 </a:solidFill>
@@ -5824,9 +7121,9 @@
                 <a:ea typeface="Arial" pitchFamily="34" charset="-122"/>
                 <a:cs typeface="Arial" pitchFamily="34" charset="-120"/>
               </a:rPr>
-              <a:t>Built against the judging criteria</a:t>
-            </a:r>
-            <a:endParaRPr lang="en-US" sz="3800" dirty="0"/>
+              <a:t>Network Intel — from 12 FIRs to one campaign</a:t>
+            </a:r>
+            <a:endParaRPr lang="en-US" sz="3600" dirty="0"/>
           </a:p>
         </p:txBody>
       </p:sp>
@@ -5839,11 +7136,11 @@
         <p:spPr>
           <a:xfrm>
             <a:off x="548640" y="1463040"/>
-            <a:ext cx="4206240" cy="804672"/>
+            <a:ext cx="6675120" cy="4754880"/>
           </a:xfrm>
           <a:prstGeom prst="roundRect">
             <a:avLst>
-              <a:gd name="adj" fmla="val 9091"/>
+              <a:gd name="adj" fmla="val 1538"/>
             </a:avLst>
           </a:prstGeom>
           <a:solidFill>
@@ -5859,22 +7156,132 @@
       </p:sp>
       <p:sp>
         <p:nvSpPr>
-          <p:cNvPr id="4" name="Shape 2"/>
-          <p:cNvSpPr/>
-          <p:nvPr/>
-        </p:nvSpPr>
-        <p:spPr>
-          <a:xfrm>
-            <a:off x="4892040" y="1463040"/>
-            <a:ext cx="6720840" cy="804672"/>
+          <p:cNvPr id="4" name="Text 2"/>
+          <p:cNvSpPr/>
+          <p:nvPr/>
+        </p:nvSpPr>
+        <p:spPr>
+          <a:xfrm>
+            <a:off x="822960" y="1645920"/>
+            <a:ext cx="6126480" cy="365760"/>
+          </a:xfrm>
+          <a:prstGeom prst="rect">
+            <a:avLst/>
+          </a:prstGeom>
+          <a:noFill/>
+          <a:ln/>
+        </p:spPr>
+        <p:txBody>
+          <a:bodyPr wrap="square" rtlCol="0" anchor="ctr"/>
+          <a:lstStyle/>
+          <a:p>
+            <a:pPr indent="0" marL="0">
+              <a:buNone/>
+            </a:pPr>
+            <a:r>
+              <a:rPr lang="en-US" sz="1600" b="1" dirty="0">
+                <a:solidFill>
+                  <a:srgbClr val="F8536B"/>
+                </a:solidFill>
+                <a:latin typeface="Calibri" pitchFamily="34" charset="0"/>
+                <a:ea typeface="Calibri" pitchFamily="34" charset="-122"/>
+                <a:cs typeface="Calibri" pitchFamily="34" charset="-120"/>
+              </a:rPr>
+              <a:t>Graph AI over fused intelligence</a:t>
+            </a:r>
+            <a:endParaRPr lang="en-US" sz="1600" dirty="0"/>
+          </a:p>
+        </p:txBody>
+      </p:sp>
+      <p:sp>
+        <p:nvSpPr>
+          <p:cNvPr id="5" name="Text 3"/>
+          <p:cNvSpPr/>
+          <p:nvPr/>
+        </p:nvSpPr>
+        <p:spPr>
+          <a:xfrm>
+            <a:off x="822960" y="2103120"/>
+            <a:ext cx="6126480" cy="3840480"/>
+          </a:xfrm>
+          <a:prstGeom prst="rect">
+            <a:avLst/>
+          </a:prstGeom>
+          <a:noFill/>
+          <a:ln/>
+        </p:spPr>
+        <p:txBody>
+          <a:bodyPr wrap="square" rtlCol="0" anchor="ctr"/>
+          <a:lstStyle/>
+          <a:p>
+            <a:pPr indent="0" marL="0">
+              <a:lnSpc>
+                <a:spcPts val="2300"/>
+              </a:lnSpc>
+              <a:buNone/>
+            </a:pPr>
+            <a:r>
+              <a:rPr lang="en-US" sz="1450" dirty="0">
+                <a:solidFill>
+                  <a:srgbClr val="DBE6F7"/>
+                </a:solidFill>
+                <a:latin typeface="Calibri" pitchFamily="34" charset="0"/>
+                <a:ea typeface="Calibri" pitchFamily="34" charset="-122"/>
+                <a:cs typeface="Calibri" pitchFamily="34" charset="-120"/>
+              </a:rPr>
+              <a:t>Entity graph fuses victim reports (I4C portal), telco CDR metadata, bank account-opening device fingerprints and account linkages. Community detection + temporal correlation expose what per-FIR investigation never sees:</a:t>
+            </a:r>
+            <a:endParaRPr lang="en-US" sz="1450" dirty="0"/>
+          </a:p>
+          <a:p>
+            <a:pPr indent="0" marL="0">
+              <a:lnSpc>
+                <a:spcPts val="2300"/>
+              </a:lnSpc>
+              <a:buNone/>
+            </a:pPr>
+            <a:endParaRPr lang="en-US" sz="1450" dirty="0"/>
+          </a:p>
+          <a:p>
+            <a:pPr indent="0" marL="0">
+              <a:lnSpc>
+                <a:spcPts val="2300"/>
+              </a:lnSpc>
+              <a:buNone/>
+            </a:pPr>
+            <a:r>
+              <a:rPr lang="en-US" sz="1450" dirty="0">
+                <a:solidFill>
+                  <a:srgbClr val="DBE6F7"/>
+                </a:solidFill>
+                <a:latin typeface="Calibri" pitchFamily="34" charset="0"/>
+                <a:ea typeface="Calibri" pitchFamily="34" charset="-122"/>
+                <a:cs typeface="Calibri" pitchFamily="34" charset="-120"/>
+              </a:rPr>
+              <a:t>12 “unrelated” victim reports across 7 states  →  one coordinated ring, run from a cross-border compound, routing ₹4.2 Cr through 6 mule accounts into crypto off-ramps and shell firms — confirmed 31 hours after the first report, at 94% confidence.</a:t>
+            </a:r>
+            <a:endParaRPr lang="en-US" sz="1450" dirty="0"/>
+          </a:p>
+        </p:txBody>
+      </p:sp>
+      <p:sp>
+        <p:nvSpPr>
+          <p:cNvPr id="6" name="Shape 4"/>
+          <p:cNvSpPr/>
+          <p:nvPr/>
+        </p:nvSpPr>
+        <p:spPr>
+          <a:xfrm>
+            <a:off x="7498080" y="1463040"/>
+            <a:ext cx="4114800" cy="2468880"/>
           </a:xfrm>
           <a:prstGeom prst="roundRect">
             <a:avLst>
-              <a:gd name="adj" fmla="val 9091"/>
+              <a:gd name="adj" fmla="val 2963"/>
             </a:avLst>
           </a:prstGeom>
           <a:solidFill>
-            <a:srgbClr val="10182B"/>
+            <a:srgbClr val="10141F"/>
           </a:solidFill>
           <a:ln w="9525">
             <a:solidFill>
@@ -5886,65 +7293,68 @@
       </p:sp>
       <p:sp>
         <p:nvSpPr>
-          <p:cNvPr id="5" name="Text 3"/>
-          <p:cNvSpPr/>
-          <p:nvPr/>
-        </p:nvSpPr>
-        <p:spPr>
-          <a:xfrm>
-            <a:off x="777240" y="1517904"/>
-            <a:ext cx="3749040" cy="694944"/>
-          </a:xfrm>
-          <a:prstGeom prst="rect">
-            <a:avLst/>
-          </a:prstGeom>
-          <a:noFill/>
-          <a:ln/>
-        </p:spPr>
-        <p:txBody>
-          <a:bodyPr wrap="square" rtlCol="0" anchor="ctr"/>
-          <a:lstStyle/>
-          <a:p>
-            <a:pPr indent="0" marL="0">
-              <a:buNone/>
-            </a:pPr>
-            <a:r>
-              <a:rPr lang="en-US" sz="1350" b="1" dirty="0">
-                <a:solidFill>
-                  <a:srgbClr val="22D3EE"/>
-                </a:solidFill>
-                <a:latin typeface="Calibri" pitchFamily="34" charset="0"/>
-                <a:ea typeface="Calibri" pitchFamily="34" charset="-122"/>
-                <a:cs typeface="Calibri" pitchFamily="34" charset="-120"/>
-              </a:rPr>
-              <a:t>Scam detection precision &amp; recall</a:t>
-            </a:r>
-            <a:endParaRPr lang="en-US" sz="1350" dirty="0"/>
-          </a:p>
-        </p:txBody>
-      </p:sp>
-      <p:sp>
-        <p:nvSpPr>
-          <p:cNvPr id="6" name="Text 4"/>
-          <p:cNvSpPr/>
-          <p:nvPr/>
-        </p:nvSpPr>
-        <p:spPr>
-          <a:xfrm>
-            <a:off x="5120640" y="1517904"/>
-            <a:ext cx="6309360" cy="694944"/>
-          </a:xfrm>
-          <a:prstGeom prst="rect">
-            <a:avLst/>
-          </a:prstGeom>
-          <a:noFill/>
-          <a:ln/>
-        </p:spPr>
-        <p:txBody>
-          <a:bodyPr wrap="square" rtlCol="0" anchor="ctr"/>
-          <a:lstStyle/>
-          <a:p>
-            <a:pPr indent="0" marL="0">
+          <p:cNvPr id="7" name="Text 5"/>
+          <p:cNvSpPr/>
+          <p:nvPr/>
+        </p:nvSpPr>
+        <p:spPr>
+          <a:xfrm>
+            <a:off x="7726680" y="1691640"/>
+            <a:ext cx="3657600" cy="411480"/>
+          </a:xfrm>
+          <a:prstGeom prst="rect">
+            <a:avLst/>
+          </a:prstGeom>
+          <a:noFill/>
+          <a:ln/>
+        </p:spPr>
+        <p:txBody>
+          <a:bodyPr wrap="square" rtlCol="0" anchor="ctr"/>
+          <a:lstStyle/>
+          <a:p>
+            <a:pPr indent="0" marL="0">
+              <a:buNone/>
+            </a:pPr>
+            <a:r>
+              <a:rPr lang="en-US" sz="1600" b="1" dirty="0">
+                <a:solidFill>
+                  <a:srgbClr val="FBBF24"/>
+                </a:solidFill>
+                <a:latin typeface="Arial" pitchFamily="34" charset="0"/>
+                <a:ea typeface="Arial" pitchFamily="34" charset="-122"/>
+                <a:cs typeface="Arial" pitchFamily="34" charset="-120"/>
+              </a:rPr>
+              <a:t>⚖ Court-ready by design</a:t>
+            </a:r>
+            <a:endParaRPr lang="en-US" sz="1600" dirty="0"/>
+          </a:p>
+        </p:txBody>
+      </p:sp>
+      <p:sp>
+        <p:nvSpPr>
+          <p:cNvPr id="8" name="Text 6"/>
+          <p:cNvSpPr/>
+          <p:nvPr/>
+        </p:nvSpPr>
+        <p:spPr>
+          <a:xfrm>
+            <a:off x="7726680" y="2148840"/>
+            <a:ext cx="3657600" cy="1645920"/>
+          </a:xfrm>
+          <a:prstGeom prst="rect">
+            <a:avLst/>
+          </a:prstGeom>
+          <a:noFill/>
+          <a:ln/>
+        </p:spPr>
+        <p:txBody>
+          <a:bodyPr wrap="square" rtlCol="0" anchor="ctr"/>
+          <a:lstStyle/>
+          <a:p>
+            <a:pPr indent="0" marL="0">
+              <a:lnSpc>
+                <a:spcPts val="1900"/>
+              </a:lnSpc>
               <a:buNone/>
             </a:pPr>
             <a:r>
@@ -5956,7 +7366,7 @@
                 <a:ea typeface="Calibri" pitchFamily="34" charset="-122"/>
                 <a:cs typeface="Calibri" pitchFamily="34" charset="-120"/>
               </a:rPr>
-              <a:t>Weighted 5-category fusion — no single keyword triggers an alarm; benign bank call demoed as negative control</a:t>
+              <a:t>Evidence packages are SHA-256 integrity-sealed and timestamped, with chain-of-custody metadata — built for legal admissibility, not just dashboards.</a:t>
             </a:r>
             <a:endParaRPr lang="en-US" sz="1250" dirty="0"/>
           </a:p>
@@ -5964,18 +7374,18 @@
       </p:sp>
       <p:sp>
         <p:nvSpPr>
-          <p:cNvPr id="7" name="Shape 5"/>
-          <p:cNvSpPr/>
-          <p:nvPr/>
-        </p:nvSpPr>
-        <p:spPr>
-          <a:xfrm>
-            <a:off x="548640" y="2395728"/>
-            <a:ext cx="4206240" cy="804672"/>
+          <p:cNvPr id="9" name="Shape 7"/>
+          <p:cNvSpPr/>
+          <p:nvPr/>
+        </p:nvSpPr>
+        <p:spPr>
+          <a:xfrm>
+            <a:off x="7498080" y="4206240"/>
+            <a:ext cx="4114800" cy="2011680"/>
           </a:xfrm>
           <a:prstGeom prst="roundRect">
             <a:avLst>
-              <a:gd name="adj" fmla="val 9091"/>
+              <a:gd name="adj" fmla="val 3636"/>
             </a:avLst>
           </a:prstGeom>
           <a:solidFill>
@@ -5991,92 +7401,68 @@
       </p:sp>
       <p:sp>
         <p:nvSpPr>
-          <p:cNvPr id="8" name="Shape 6"/>
-          <p:cNvSpPr/>
-          <p:nvPr/>
-        </p:nvSpPr>
-        <p:spPr>
-          <a:xfrm>
-            <a:off x="4892040" y="2395728"/>
-            <a:ext cx="6720840" cy="804672"/>
-          </a:xfrm>
-          <a:prstGeom prst="roundRect">
-            <a:avLst>
-              <a:gd name="adj" fmla="val 9091"/>
-            </a:avLst>
-          </a:prstGeom>
-          <a:solidFill>
-            <a:srgbClr val="10182B"/>
-          </a:solidFill>
-          <a:ln w="9525">
-            <a:solidFill>
-              <a:srgbClr val="24365C"/>
-            </a:solidFill>
-            <a:prstDash val="solid"/>
-          </a:ln>
-        </p:spPr>
-      </p:sp>
-      <p:sp>
-        <p:nvSpPr>
-          <p:cNvPr id="9" name="Text 7"/>
-          <p:cNvSpPr/>
-          <p:nvPr/>
-        </p:nvSpPr>
-        <p:spPr>
-          <a:xfrm>
-            <a:off x="777240" y="2450592"/>
-            <a:ext cx="3749040" cy="694944"/>
-          </a:xfrm>
-          <a:prstGeom prst="rect">
-            <a:avLst/>
-          </a:prstGeom>
-          <a:noFill/>
-          <a:ln/>
-        </p:spPr>
-        <p:txBody>
-          <a:bodyPr wrap="square" rtlCol="0" anchor="ctr"/>
-          <a:lstStyle/>
-          <a:p>
-            <a:pPr indent="0" marL="0">
-              <a:buNone/>
-            </a:pPr>
-            <a:r>
-              <a:rPr lang="en-US" sz="1350" b="1" dirty="0">
-                <a:solidFill>
-                  <a:srgbClr val="22D3EE"/>
-                </a:solidFill>
-                <a:latin typeface="Calibri" pitchFamily="34" charset="0"/>
-                <a:ea typeface="Calibri" pitchFamily="34" charset="-122"/>
-                <a:cs typeface="Calibri" pitchFamily="34" charset="-120"/>
-              </a:rPr>
-              <a:t>Counterfeit detection across print quality</a:t>
-            </a:r>
-            <a:endParaRPr lang="en-US" sz="1350" dirty="0"/>
-          </a:p>
-        </p:txBody>
-      </p:sp>
-      <p:sp>
-        <p:nvSpPr>
           <p:cNvPr id="10" name="Text 8"/>
           <p:cNvSpPr/>
           <p:nvPr/>
         </p:nvSpPr>
         <p:spPr>
           <a:xfrm>
-            <a:off x="5120640" y="2450592"/>
-            <a:ext cx="6309360" cy="694944"/>
-          </a:xfrm>
-          <a:prstGeom prst="rect">
-            <a:avLst/>
-          </a:prstGeom>
-          <a:noFill/>
-          <a:ln/>
-        </p:spPr>
-        <p:txBody>
-          <a:bodyPr wrap="square" rtlCol="0" anchor="ctr"/>
-          <a:lstStyle/>
-          <a:p>
-            <a:pPr indent="0" marL="0">
+            <a:off x="7726680" y="4389120"/>
+            <a:ext cx="3657600" cy="365760"/>
+          </a:xfrm>
+          <a:prstGeom prst="rect">
+            <a:avLst/>
+          </a:prstGeom>
+          <a:noFill/>
+          <a:ln/>
+        </p:spPr>
+        <p:txBody>
+          <a:bodyPr wrap="square" rtlCol="0" anchor="ctr"/>
+          <a:lstStyle/>
+          <a:p>
+            <a:pPr indent="0" marL="0">
+              <a:buNone/>
+            </a:pPr>
+            <a:r>
+              <a:rPr lang="en-US" sz="1400" b="1" dirty="0">
+                <a:solidFill>
+                  <a:srgbClr val="F8536B"/>
+                </a:solidFill>
+                <a:latin typeface="Calibri" pitchFamily="34" charset="0"/>
+                <a:ea typeface="Calibri" pitchFamily="34" charset="-122"/>
+                <a:cs typeface="Calibri" pitchFamily="34" charset="-120"/>
+              </a:rPr>
+              <a:t>One-click actions</a:t>
+            </a:r>
+            <a:endParaRPr lang="en-US" sz="1400" dirty="0"/>
+          </a:p>
+        </p:txBody>
+      </p:sp>
+      <p:sp>
+        <p:nvSpPr>
+          <p:cNvPr id="11" name="Text 9"/>
+          <p:cNvSpPr/>
+          <p:nvPr/>
+        </p:nvSpPr>
+        <p:spPr>
+          <a:xfrm>
+            <a:off x="7726680" y="4800600"/>
+            <a:ext cx="3657600" cy="1280160"/>
+          </a:xfrm>
+          <a:prstGeom prst="rect">
+            <a:avLst/>
+          </a:prstGeom>
+          <a:noFill/>
+          <a:ln/>
+        </p:spPr>
+        <p:txBody>
+          <a:bodyPr wrap="square" rtlCol="0" anchor="ctr"/>
+          <a:lstStyle/>
+          <a:p>
+            <a:pPr indent="0" marL="0">
+              <a:lnSpc>
+                <a:spcPts val="2000"/>
+              </a:lnSpc>
               <a:buNone/>
             </a:pPr>
             <a:r>
@@ -6088,127 +7474,15 @@
                 <a:ea typeface="Calibri" pitchFamily="34" charset="-122"/>
                 <a:cs typeface="Calibri" pitchFamily="34" charset="-120"/>
               </a:rPr>
-              <a:t>Per-feature confidence scoring + serial-pattern validation catches even high-quality reprints of seized series</a:t>
+              <a:t>✓ Freeze requests for all mule accounts</a:t>
             </a:r>
             <a:endParaRPr lang="en-US" sz="1250" dirty="0"/>
           </a:p>
-        </p:txBody>
-      </p:sp>
-      <p:sp>
-        <p:nvSpPr>
-          <p:cNvPr id="11" name="Shape 9"/>
-          <p:cNvSpPr/>
-          <p:nvPr/>
-        </p:nvSpPr>
-        <p:spPr>
-          <a:xfrm>
-            <a:off x="548640" y="3328416"/>
-            <a:ext cx="4206240" cy="804672"/>
-          </a:xfrm>
-          <a:prstGeom prst="roundRect">
-            <a:avLst>
-              <a:gd name="adj" fmla="val 9091"/>
-            </a:avLst>
-          </a:prstGeom>
-          <a:solidFill>
-            <a:srgbClr val="141F38"/>
-          </a:solidFill>
-          <a:ln w="9525">
-            <a:solidFill>
-              <a:srgbClr val="24365C"/>
-            </a:solidFill>
-            <a:prstDash val="solid"/>
-          </a:ln>
-        </p:spPr>
-      </p:sp>
-      <p:sp>
-        <p:nvSpPr>
-          <p:cNvPr id="12" name="Shape 10"/>
-          <p:cNvSpPr/>
-          <p:nvPr/>
-        </p:nvSpPr>
-        <p:spPr>
-          <a:xfrm>
-            <a:off x="4892040" y="3328416"/>
-            <a:ext cx="6720840" cy="804672"/>
-          </a:xfrm>
-          <a:prstGeom prst="roundRect">
-            <a:avLst>
-              <a:gd name="adj" fmla="val 9091"/>
-            </a:avLst>
-          </a:prstGeom>
-          <a:solidFill>
-            <a:srgbClr val="10182B"/>
-          </a:solidFill>
-          <a:ln w="9525">
-            <a:solidFill>
-              <a:srgbClr val="24365C"/>
-            </a:solidFill>
-            <a:prstDash val="solid"/>
-          </a:ln>
-        </p:spPr>
-      </p:sp>
-      <p:sp>
-        <p:nvSpPr>
-          <p:cNvPr id="13" name="Text 11"/>
-          <p:cNvSpPr/>
-          <p:nvPr/>
-        </p:nvSpPr>
-        <p:spPr>
-          <a:xfrm>
-            <a:off x="777240" y="3383280"/>
-            <a:ext cx="3749040" cy="694944"/>
-          </a:xfrm>
-          <a:prstGeom prst="rect">
-            <a:avLst/>
-          </a:prstGeom>
-          <a:noFill/>
-          <a:ln/>
-        </p:spPr>
-        <p:txBody>
-          <a:bodyPr wrap="square" rtlCol="0" anchor="ctr"/>
-          <a:lstStyle/>
-          <a:p>
-            <a:pPr indent="0" marL="0">
-              <a:buNone/>
-            </a:pPr>
-            <a:r>
-              <a:rPr lang="en-US" sz="1350" b="1" dirty="0">
-                <a:solidFill>
-                  <a:srgbClr val="22D3EE"/>
-                </a:solidFill>
-                <a:latin typeface="Calibri" pitchFamily="34" charset="0"/>
-                <a:ea typeface="Calibri" pitchFamily="34" charset="-122"/>
-                <a:cs typeface="Calibri" pitchFamily="34" charset="-120"/>
-              </a:rPr>
-              <a:t>Lead time before mass victimisation</a:t>
-            </a:r>
-            <a:endParaRPr lang="en-US" sz="1350" dirty="0"/>
-          </a:p>
-        </p:txBody>
-      </p:sp>
-      <p:sp>
-        <p:nvSpPr>
-          <p:cNvPr id="14" name="Text 12"/>
-          <p:cNvSpPr/>
-          <p:nvPr/>
-        </p:nvSpPr>
-        <p:spPr>
-          <a:xfrm>
-            <a:off x="5120640" y="3383280"/>
-            <a:ext cx="6309360" cy="694944"/>
-          </a:xfrm>
-          <a:prstGeom prst="rect">
-            <a:avLst/>
-          </a:prstGeom>
-          <a:noFill/>
-          <a:ln/>
-        </p:spPr>
-        <p:txBody>
-          <a:bodyPr wrap="square" rtlCol="0" anchor="ctr"/>
-          <a:lstStyle/>
-          <a:p>
-            <a:pPr indent="0" marL="0">
+          <a:p>
+            <a:pPr indent="0" marL="0">
+              <a:lnSpc>
+                <a:spcPts val="2000"/>
+              </a:lnSpc>
               <a:buNone/>
             </a:pPr>
             <a:r>
@@ -6220,127 +7494,15 @@
                 <a:ea typeface="Calibri" pitchFamily="34" charset="-122"/>
                 <a:cs typeface="Calibri" pitchFamily="34" charset="-120"/>
               </a:rPr>
-              <a:t>Campaign confirmed at T+31 hours after first report — while mule accounts still hold funds</a:t>
+              <a:t>✓ Inter-state alerts to 7 cyber cells</a:t>
             </a:r>
             <a:endParaRPr lang="en-US" sz="1250" dirty="0"/>
           </a:p>
-        </p:txBody>
-      </p:sp>
-      <p:sp>
-        <p:nvSpPr>
-          <p:cNvPr id="15" name="Shape 13"/>
-          <p:cNvSpPr/>
-          <p:nvPr/>
-        </p:nvSpPr>
-        <p:spPr>
-          <a:xfrm>
-            <a:off x="548640" y="4261104"/>
-            <a:ext cx="4206240" cy="804672"/>
-          </a:xfrm>
-          <a:prstGeom prst="roundRect">
-            <a:avLst>
-              <a:gd name="adj" fmla="val 9091"/>
-            </a:avLst>
-          </a:prstGeom>
-          <a:solidFill>
-            <a:srgbClr val="141F38"/>
-          </a:solidFill>
-          <a:ln w="9525">
-            <a:solidFill>
-              <a:srgbClr val="24365C"/>
-            </a:solidFill>
-            <a:prstDash val="solid"/>
-          </a:ln>
-        </p:spPr>
-      </p:sp>
-      <p:sp>
-        <p:nvSpPr>
-          <p:cNvPr id="16" name="Shape 14"/>
-          <p:cNvSpPr/>
-          <p:nvPr/>
-        </p:nvSpPr>
-        <p:spPr>
-          <a:xfrm>
-            <a:off x="4892040" y="4261104"/>
-            <a:ext cx="6720840" cy="804672"/>
-          </a:xfrm>
-          <a:prstGeom prst="roundRect">
-            <a:avLst>
-              <a:gd name="adj" fmla="val 9091"/>
-            </a:avLst>
-          </a:prstGeom>
-          <a:solidFill>
-            <a:srgbClr val="10182B"/>
-          </a:solidFill>
-          <a:ln w="9525">
-            <a:solidFill>
-              <a:srgbClr val="24365C"/>
-            </a:solidFill>
-            <a:prstDash val="solid"/>
-          </a:ln>
-        </p:spPr>
-      </p:sp>
-      <p:sp>
-        <p:nvSpPr>
-          <p:cNvPr id="17" name="Text 15"/>
-          <p:cNvSpPr/>
-          <p:nvPr/>
-        </p:nvSpPr>
-        <p:spPr>
-          <a:xfrm>
-            <a:off x="777240" y="4315968"/>
-            <a:ext cx="3749040" cy="694944"/>
-          </a:xfrm>
-          <a:prstGeom prst="rect">
-            <a:avLst/>
-          </a:prstGeom>
-          <a:noFill/>
-          <a:ln/>
-        </p:spPr>
-        <p:txBody>
-          <a:bodyPr wrap="square" rtlCol="0" anchor="ctr"/>
-          <a:lstStyle/>
-          <a:p>
-            <a:pPr indent="0" marL="0">
-              <a:buNone/>
-            </a:pPr>
-            <a:r>
-              <a:rPr lang="en-US" sz="1350" b="1" dirty="0">
-                <a:solidFill>
-                  <a:srgbClr val="22D3EE"/>
-                </a:solidFill>
-                <a:latin typeface="Calibri" pitchFamily="34" charset="0"/>
-                <a:ea typeface="Calibri" pitchFamily="34" charset="-122"/>
-                <a:cs typeface="Calibri" pitchFamily="34" charset="-120"/>
-              </a:rPr>
-              <a:t>Very low citizen-facing false positives</a:t>
-            </a:r>
-            <a:endParaRPr lang="en-US" sz="1350" dirty="0"/>
-          </a:p>
-        </p:txBody>
-      </p:sp>
-      <p:sp>
-        <p:nvSpPr>
-          <p:cNvPr id="18" name="Text 16"/>
-          <p:cNvSpPr/>
-          <p:nvPr/>
-        </p:nvSpPr>
-        <p:spPr>
-          <a:xfrm>
-            <a:off x="5120640" y="4315968"/>
-            <a:ext cx="6309360" cy="694944"/>
-          </a:xfrm>
-          <a:prstGeom prst="rect">
-            <a:avLst/>
-          </a:prstGeom>
-          <a:noFill/>
-          <a:ln/>
-        </p:spPr>
-        <p:txBody>
-          <a:bodyPr wrap="square" rtlCol="0" anchor="ctr"/>
-          <a:lstStyle/>
-          <a:p>
-            <a:pPr indent="0" marL="0">
+          <a:p>
+            <a:pPr indent="0" marL="0">
+              <a:lnSpc>
+                <a:spcPts val="2000"/>
+              </a:lnSpc>
               <a:buNone/>
             </a:pPr>
             <a:r>
@@ -6352,7 +7514,7 @@
                 <a:ea typeface="Calibri" pitchFamily="34" charset="-122"/>
                 <a:cs typeface="Calibri" pitchFamily="34" charset="-120"/>
               </a:rPr>
-              <a:t>Explainable, phrase-level verdicts; saturating category scores; tiered verdicts instead of binary alarms</a:t>
+              <a:t>✓ VoIP block takedown request to DoT</a:t>
             </a:r>
             <a:endParaRPr lang="en-US" sz="1250" dirty="0"/>
           </a:p>
@@ -6360,139 +7522,7 @@
       </p:sp>
       <p:sp>
         <p:nvSpPr>
-          <p:cNvPr id="19" name="Shape 17"/>
-          <p:cNvSpPr/>
-          <p:nvPr/>
-        </p:nvSpPr>
-        <p:spPr>
-          <a:xfrm>
-            <a:off x="548640" y="5193792"/>
-            <a:ext cx="4206240" cy="804672"/>
-          </a:xfrm>
-          <a:prstGeom prst="roundRect">
-            <a:avLst>
-              <a:gd name="adj" fmla="val 9091"/>
-            </a:avLst>
-          </a:prstGeom>
-          <a:solidFill>
-            <a:srgbClr val="141F38"/>
-          </a:solidFill>
-          <a:ln w="9525">
-            <a:solidFill>
-              <a:srgbClr val="24365C"/>
-            </a:solidFill>
-            <a:prstDash val="solid"/>
-          </a:ln>
-        </p:spPr>
-      </p:sp>
-      <p:sp>
-        <p:nvSpPr>
-          <p:cNvPr id="20" name="Shape 18"/>
-          <p:cNvSpPr/>
-          <p:nvPr/>
-        </p:nvSpPr>
-        <p:spPr>
-          <a:xfrm>
-            <a:off x="4892040" y="5193792"/>
-            <a:ext cx="6720840" cy="804672"/>
-          </a:xfrm>
-          <a:prstGeom prst="roundRect">
-            <a:avLst>
-              <a:gd name="adj" fmla="val 9091"/>
-            </a:avLst>
-          </a:prstGeom>
-          <a:solidFill>
-            <a:srgbClr val="10182B"/>
-          </a:solidFill>
-          <a:ln w="9525">
-            <a:solidFill>
-              <a:srgbClr val="24365C"/>
-            </a:solidFill>
-            <a:prstDash val="solid"/>
-          </a:ln>
-        </p:spPr>
-      </p:sp>
-      <p:sp>
-        <p:nvSpPr>
-          <p:cNvPr id="21" name="Text 19"/>
-          <p:cNvSpPr/>
-          <p:nvPr/>
-        </p:nvSpPr>
-        <p:spPr>
-          <a:xfrm>
-            <a:off x="777240" y="5248656"/>
-            <a:ext cx="3749040" cy="694944"/>
-          </a:xfrm>
-          <a:prstGeom prst="rect">
-            <a:avLst/>
-          </a:prstGeom>
-          <a:noFill/>
-          <a:ln/>
-        </p:spPr>
-        <p:txBody>
-          <a:bodyPr wrap="square" rtlCol="0" anchor="ctr"/>
-          <a:lstStyle/>
-          <a:p>
-            <a:pPr indent="0" marL="0">
-              <a:buNone/>
-            </a:pPr>
-            <a:r>
-              <a:rPr lang="en-US" sz="1350" b="1" dirty="0">
-                <a:solidFill>
-                  <a:srgbClr val="22D3EE"/>
-                </a:solidFill>
-                <a:latin typeface="Calibri" pitchFamily="34" charset="0"/>
-                <a:ea typeface="Calibri" pitchFamily="34" charset="-122"/>
-                <a:cs typeface="Calibri" pitchFamily="34" charset="-120"/>
-              </a:rPr>
-              <a:t>Auditability &amp; legal admissibility</a:t>
-            </a:r>
-            <a:endParaRPr lang="en-US" sz="1350" dirty="0"/>
-          </a:p>
-        </p:txBody>
-      </p:sp>
-      <p:sp>
-        <p:nvSpPr>
-          <p:cNvPr id="22" name="Text 20"/>
-          <p:cNvSpPr/>
-          <p:nvPr/>
-        </p:nvSpPr>
-        <p:spPr>
-          <a:xfrm>
-            <a:off x="5120640" y="5248656"/>
-            <a:ext cx="6309360" cy="694944"/>
-          </a:xfrm>
-          <a:prstGeom prst="rect">
-            <a:avLst/>
-          </a:prstGeom>
-          <a:noFill/>
-          <a:ln/>
-        </p:spPr>
-        <p:txBody>
-          <a:bodyPr wrap="square" rtlCol="0" anchor="ctr"/>
-          <a:lstStyle/>
-          <a:p>
-            <a:pPr indent="0" marL="0">
-              <a:buNone/>
-            </a:pPr>
-            <a:r>
-              <a:rPr lang="en-US" sz="1250" dirty="0">
-                <a:solidFill>
-                  <a:srgbClr val="DBE6F7"/>
-                </a:solidFill>
-                <a:latin typeface="Calibri" pitchFamily="34" charset="0"/>
-                <a:ea typeface="Calibri" pitchFamily="34" charset="-122"/>
-                <a:cs typeface="Calibri" pitchFamily="34" charset="-120"/>
-              </a:rPr>
-              <a:t>SHA-256-sealed, timestamped evidence packages with chain-of-custody metadata</a:t>
-            </a:r>
-            <a:endParaRPr lang="en-US" sz="1250" dirty="0"/>
-          </a:p>
-        </p:txBody>
-      </p:sp>
-      <p:sp>
-        <p:nvSpPr>
-          <p:cNvPr id="23" name="Text 21"/>
+          <p:cNvPr id="12" name="Text 10"/>
           <p:cNvSpPr/>
           <p:nvPr/>
         </p:nvSpPr>
@@ -6531,7 +7561,7 @@
       </p:sp>
       <p:sp>
         <p:nvSpPr>
-          <p:cNvPr id="24" name="Text 22"/>
+          <p:cNvPr id="13" name="Text 11"/>
           <p:cNvSpPr/>
           <p:nvPr/>
         </p:nvSpPr>
@@ -6608,23 +7638,20 @@
         </p:nvSpPr>
         <p:spPr>
           <a:xfrm>
-            <a:off x="914400" y="1371600"/>
-            <a:ext cx="10360152" cy="1463040"/>
-          </a:xfrm>
-          <a:prstGeom prst="rect">
-            <a:avLst/>
-          </a:prstGeom>
-          <a:noFill/>
-          <a:ln/>
-        </p:spPr>
-        <p:txBody>
-          <a:bodyPr wrap="square" rtlCol="0" anchor="ctr"/>
-          <a:lstStyle/>
-          <a:p>
-            <a:pPr algn="ctr" indent="0" marL="0">
-              <a:lnSpc>
-                <a:spcPts val="4200"/>
-              </a:lnSpc>
+            <a:off x="457200" y="411480"/>
+            <a:ext cx="11247120" cy="731520"/>
+          </a:xfrm>
+          <a:prstGeom prst="rect">
+            <a:avLst/>
+          </a:prstGeom>
+          <a:noFill/>
+          <a:ln/>
+        </p:spPr>
+        <p:txBody>
+          <a:bodyPr wrap="square" rtlCol="0" anchor="ctr"/>
+          <a:lstStyle/>
+          <a:p>
+            <a:pPr indent="0" marL="0">
               <a:buNone/>
             </a:pPr>
             <a:r>
@@ -6636,22 +7663,46 @@
                 <a:ea typeface="Arial" pitchFamily="34" charset="-122"/>
                 <a:cs typeface="Arial" pitchFamily="34" charset="-120"/>
               </a:rPr>
-              <a:t>The window that matters is before the money moves.</a:t>
+              <a:t>Real inference, on real inputs</a:t>
             </a:r>
             <a:endParaRPr lang="en-US" sz="3400" dirty="0"/>
           </a:p>
         </p:txBody>
       </p:sp>
-      <p:sp>
-        <p:nvSpPr>
-          <p:cNvPr id="3" name="Text 1"/>
-          <p:cNvSpPr/>
-          <p:nvPr/>
-        </p:nvSpPr>
-        <p:spPr>
-          <a:xfrm>
-            <a:off x="1371600" y="2880360"/>
-            <a:ext cx="9445752" cy="914400"/>
+      <p:pic>
+        <p:nvPicPr>
+          <p:cNvPr id="3" name="Image 0" descr="C:\Users\91800\Desktop\ET Hack 2\Screenshots\Digital_Arrest_Intercepted.png">    </p:cNvPr>
+          <p:cNvPicPr>
+            <a:picLocks noChangeAspect="1"/>
+          </p:cNvPicPr>
+          <p:nvPr/>
+        </p:nvPicPr>
+        <p:blipFill>
+          <a:blip r:embed="rId1"/>
+          <a:stretch>
+            <a:fillRect/>
+          </a:stretch>
+        </p:blipFill>
+        <p:spPr>
+          <a:xfrm>
+            <a:off x="548640" y="1463040"/>
+            <a:ext cx="5532120" cy="3108960"/>
+          </a:xfrm>
+          <a:prstGeom prst="rect">
+            <a:avLst/>
+          </a:prstGeom>
+        </p:spPr>
+      </p:pic>
+      <p:sp>
+        <p:nvSpPr>
+          <p:cNvPr id="4" name="Text 1"/>
+          <p:cNvSpPr/>
+          <p:nvPr/>
+        </p:nvSpPr>
+        <p:spPr>
+          <a:xfrm>
+            <a:off x="548640" y="4617720"/>
+            <a:ext cx="5532120" cy="457200"/>
           </a:xfrm>
           <a:prstGeom prst="rect">
             <a:avLst/>
@@ -6664,13 +7715,112 @@
           <a:lstStyle/>
           <a:p>
             <a:pPr algn="ctr" indent="0" marL="0">
-              <a:lnSpc>
-                <a:spcPts val="2600"/>
-              </a:lnSpc>
-              <a:buNone/>
-            </a:pPr>
-            <a:r>
-              <a:rPr lang="en-US" sz="1800" dirty="0">
+              <a:buNone/>
+            </a:pPr>
+            <a:r>
+              <a:rPr lang="en-US" sz="1250" dirty="0">
+                <a:solidFill>
+                  <a:srgbClr val="8CA0C4"/>
+                </a:solidFill>
+                <a:latin typeface="Calibri" pitchFamily="34" charset="0"/>
+                <a:ea typeface="Calibri" pitchFamily="34" charset="-122"/>
+                <a:cs typeface="Calibri" pitchFamily="34" charset="-120"/>
+              </a:rPr>
+              <a:t>Interception at T+72s — before any transfer; bilingual victim alert + bank hold</a:t>
+            </a:r>
+            <a:endParaRPr lang="en-US" sz="1250" dirty="0"/>
+          </a:p>
+        </p:txBody>
+      </p:sp>
+      <p:pic>
+        <p:nvPicPr>
+          <p:cNvPr id="5" name="Image 1" descr="C:\Users\91800\Desktop\ET Hack 2\Screenshots\FICN_Scanner_Photo_Upload_Genuine.png">    </p:cNvPr>
+          <p:cNvPicPr>
+            <a:picLocks noChangeAspect="1"/>
+          </p:cNvPicPr>
+          <p:nvPr/>
+        </p:nvPicPr>
+        <p:blipFill>
+          <a:blip r:embed="rId2"/>
+          <a:stretch>
+            <a:fillRect/>
+          </a:stretch>
+        </p:blipFill>
+        <p:spPr>
+          <a:xfrm>
+            <a:off x="6309360" y="1463040"/>
+            <a:ext cx="5532120" cy="3108960"/>
+          </a:xfrm>
+          <a:prstGeom prst="rect">
+            <a:avLst/>
+          </a:prstGeom>
+        </p:spPr>
+      </p:pic>
+      <p:sp>
+        <p:nvSpPr>
+          <p:cNvPr id="6" name="Text 2"/>
+          <p:cNvSpPr/>
+          <p:nvPr/>
+        </p:nvSpPr>
+        <p:spPr>
+          <a:xfrm>
+            <a:off x="6309360" y="4617720"/>
+            <a:ext cx="5532120" cy="457200"/>
+          </a:xfrm>
+          <a:prstGeom prst="rect">
+            <a:avLst/>
+          </a:prstGeom>
+          <a:noFill/>
+          <a:ln/>
+        </p:spPr>
+        <p:txBody>
+          <a:bodyPr wrap="square" rtlCol="0" anchor="ctr"/>
+          <a:lstStyle/>
+          <a:p>
+            <a:pPr algn="ctr" indent="0" marL="0">
+              <a:buNone/>
+            </a:pPr>
+            <a:r>
+              <a:rPr lang="en-US" sz="1250" dirty="0">
+                <a:solidFill>
+                  <a:srgbClr val="8CA0C4"/>
+                </a:solidFill>
+                <a:latin typeface="Calibri" pitchFamily="34" charset="0"/>
+                <a:ea typeface="Calibri" pitchFamily="34" charset="-122"/>
+                <a:cs typeface="Calibri" pitchFamily="34" charset="-120"/>
+              </a:rPr>
+              <a:t>A real note photo: auto-cropped, MobileNet+k-NN verdict — genuine, ₹500 (5/5 on hold-outs)</a:t>
+            </a:r>
+            <a:endParaRPr lang="en-US" sz="1250" dirty="0"/>
+          </a:p>
+        </p:txBody>
+      </p:sp>
+      <p:sp>
+        <p:nvSpPr>
+          <p:cNvPr id="7" name="Text 3"/>
+          <p:cNvSpPr/>
+          <p:nvPr/>
+        </p:nvSpPr>
+        <p:spPr>
+          <a:xfrm>
+            <a:off x="548640" y="5394960"/>
+            <a:ext cx="11247120" cy="457200"/>
+          </a:xfrm>
+          <a:prstGeom prst="rect">
+            <a:avLst/>
+          </a:prstGeom>
+          <a:noFill/>
+          <a:ln/>
+        </p:spPr>
+        <p:txBody>
+          <a:bodyPr wrap="square" rtlCol="0" anchor="ctr"/>
+          <a:lstStyle/>
+          <a:p>
+            <a:pPr algn="ctr" indent="0" marL="0">
+              <a:buNone/>
+            </a:pPr>
+            <a:r>
+              <a:rPr lang="en-US" sz="1400" i="1" dirty="0">
                 <a:solidFill>
                   <a:srgbClr val="22D3EE"/>
                 </a:solidFill>
@@ -6678,382 +7828,38 @@
                 <a:ea typeface="Calibri" pitchFamily="34" charset="-122"/>
                 <a:cs typeface="Calibri" pitchFamily="34" charset="-120"/>
               </a:rPr>
-              <a:t>PRAHARI protects that window — for the citizen on the call,</a:t>
-            </a:r>
-            <a:endParaRPr lang="en-US" sz="1800" dirty="0"/>
-          </a:p>
-          <a:p>
-            <a:pPr algn="ctr" indent="0" marL="0">
-              <a:lnSpc>
-                <a:spcPts val="2600"/>
-              </a:lnSpc>
-              <a:buNone/>
-            </a:pPr>
-            <a:r>
-              <a:rPr lang="en-US" sz="1800" dirty="0">
-                <a:solidFill>
-                  <a:srgbClr val="22D3EE"/>
-                </a:solidFill>
-                <a:latin typeface="Calibri" pitchFamily="34" charset="0"/>
-                <a:ea typeface="Calibri" pitchFamily="34" charset="-122"/>
-                <a:cs typeface="Calibri" pitchFamily="34" charset="-120"/>
-              </a:rPr>
-              <a:t>the teller at the counter, and the officer chasing the network.</a:t>
-            </a:r>
-            <a:endParaRPr lang="en-US" sz="1800" dirty="0"/>
-          </a:p>
-        </p:txBody>
-      </p:sp>
-      <p:sp>
-        <p:nvSpPr>
-          <p:cNvPr id="4" name="Shape 2"/>
-          <p:cNvSpPr/>
-          <p:nvPr/>
-        </p:nvSpPr>
-        <p:spPr>
-          <a:xfrm>
-            <a:off x="914400" y="4114800"/>
-            <a:ext cx="3246120" cy="1371600"/>
-          </a:xfrm>
-          <a:prstGeom prst="roundRect">
-            <a:avLst>
-              <a:gd name="adj" fmla="val 5333"/>
-            </a:avLst>
-          </a:prstGeom>
-          <a:solidFill>
-            <a:srgbClr val="141F38"/>
-          </a:solidFill>
-          <a:ln w="9525">
-            <a:solidFill>
-              <a:srgbClr val="24365C"/>
-            </a:solidFill>
-            <a:prstDash val="solid"/>
-          </a:ln>
-        </p:spPr>
-      </p:sp>
-      <p:sp>
-        <p:nvSpPr>
-          <p:cNvPr id="5" name="Text 3"/>
-          <p:cNvSpPr/>
-          <p:nvPr/>
-        </p:nvSpPr>
-        <p:spPr>
-          <a:xfrm>
-            <a:off x="1097280" y="4251960"/>
-            <a:ext cx="2880360" cy="365760"/>
-          </a:xfrm>
-          <a:prstGeom prst="rect">
-            <a:avLst/>
-          </a:prstGeom>
-          <a:noFill/>
-          <a:ln/>
-        </p:spPr>
-        <p:txBody>
-          <a:bodyPr wrap="square" rtlCol="0" anchor="ctr"/>
-          <a:lstStyle/>
-          <a:p>
-            <a:pPr indent="0" marL="0">
-              <a:buNone/>
-            </a:pPr>
-            <a:r>
-              <a:rPr lang="en-US" sz="1500" b="1" dirty="0">
-                <a:solidFill>
-                  <a:srgbClr val="FBBF24"/>
-                </a:solidFill>
-                <a:latin typeface="Arial" pitchFamily="34" charset="0"/>
-                <a:ea typeface="Arial" pitchFamily="34" charset="-122"/>
-                <a:cs typeface="Arial" pitchFamily="34" charset="-120"/>
-              </a:rPr>
-              <a:t>0–3 mo</a:t>
-            </a:r>
-            <a:endParaRPr lang="en-US" sz="1500" dirty="0"/>
-          </a:p>
-        </p:txBody>
-      </p:sp>
-      <p:sp>
-        <p:nvSpPr>
-          <p:cNvPr id="6" name="Text 4"/>
-          <p:cNvSpPr/>
-          <p:nvPr/>
-        </p:nvSpPr>
-        <p:spPr>
-          <a:xfrm>
-            <a:off x="1097280" y="4617720"/>
-            <a:ext cx="2880360" cy="777240"/>
-          </a:xfrm>
-          <a:prstGeom prst="rect">
-            <a:avLst/>
-          </a:prstGeom>
-          <a:noFill/>
-          <a:ln/>
-        </p:spPr>
-        <p:txBody>
-          <a:bodyPr wrap="square" rtlCol="0" anchor="ctr"/>
-          <a:lstStyle/>
-          <a:p>
-            <a:pPr indent="0" marL="0">
-              <a:lnSpc>
-                <a:spcPts val="1600"/>
-              </a:lnSpc>
-              <a:buNone/>
-            </a:pPr>
-            <a:r>
-              <a:rPr lang="en-US" sz="1150" dirty="0">
-                <a:solidFill>
-                  <a:srgbClr val="DBE6F7"/>
-                </a:solidFill>
-                <a:latin typeface="Calibri" pitchFamily="34" charset="0"/>
-                <a:ea typeface="Calibri" pitchFamily="34" charset="-122"/>
-                <a:cs typeface="Calibri" pitchFamily="34" charset="-120"/>
-              </a:rPr>
-              <a:t>Telecom-circle pilot · classifier fine-tuned on I4C corpus</a:t>
-            </a:r>
-            <a:endParaRPr lang="en-US" sz="1150" dirty="0"/>
-          </a:p>
-        </p:txBody>
-      </p:sp>
-      <p:sp>
-        <p:nvSpPr>
-          <p:cNvPr id="7" name="Shape 5"/>
-          <p:cNvSpPr/>
-          <p:nvPr/>
-        </p:nvSpPr>
-        <p:spPr>
-          <a:xfrm>
-            <a:off x="4434840" y="4114800"/>
-            <a:ext cx="3246120" cy="1371600"/>
-          </a:xfrm>
-          <a:prstGeom prst="roundRect">
-            <a:avLst>
-              <a:gd name="adj" fmla="val 5333"/>
-            </a:avLst>
-          </a:prstGeom>
-          <a:solidFill>
-            <a:srgbClr val="141F38"/>
-          </a:solidFill>
-          <a:ln w="9525">
-            <a:solidFill>
-              <a:srgbClr val="24365C"/>
-            </a:solidFill>
-            <a:prstDash val="solid"/>
-          </a:ln>
-        </p:spPr>
-      </p:sp>
-      <p:sp>
-        <p:nvSpPr>
-          <p:cNvPr id="8" name="Text 6"/>
-          <p:cNvSpPr/>
-          <p:nvPr/>
-        </p:nvSpPr>
-        <p:spPr>
-          <a:xfrm>
-            <a:off x="4617720" y="4251960"/>
-            <a:ext cx="2880360" cy="365760"/>
-          </a:xfrm>
-          <a:prstGeom prst="rect">
-            <a:avLst/>
-          </a:prstGeom>
-          <a:noFill/>
-          <a:ln/>
-        </p:spPr>
-        <p:txBody>
-          <a:bodyPr wrap="square" rtlCol="0" anchor="ctr"/>
-          <a:lstStyle/>
-          <a:p>
-            <a:pPr indent="0" marL="0">
-              <a:buNone/>
-            </a:pPr>
-            <a:r>
-              <a:rPr lang="en-US" sz="1500" b="1" dirty="0">
-                <a:solidFill>
-                  <a:srgbClr val="FBBF24"/>
-                </a:solidFill>
-                <a:latin typeface="Arial" pitchFamily="34" charset="0"/>
-                <a:ea typeface="Arial" pitchFamily="34" charset="-122"/>
-                <a:cs typeface="Arial" pitchFamily="34" charset="-120"/>
-              </a:rPr>
-              <a:t>3–9 mo</a:t>
-            </a:r>
-            <a:endParaRPr lang="en-US" sz="1500" dirty="0"/>
-          </a:p>
-        </p:txBody>
-      </p:sp>
-      <p:sp>
-        <p:nvSpPr>
-          <p:cNvPr id="9" name="Text 7"/>
-          <p:cNvSpPr/>
-          <p:nvPr/>
-        </p:nvSpPr>
-        <p:spPr>
-          <a:xfrm>
-            <a:off x="4617720" y="4617720"/>
-            <a:ext cx="2880360" cy="777240"/>
-          </a:xfrm>
-          <a:prstGeom prst="rect">
-            <a:avLst/>
-          </a:prstGeom>
-          <a:noFill/>
-          <a:ln/>
-        </p:spPr>
-        <p:txBody>
-          <a:bodyPr wrap="square" rtlCol="0" anchor="ctr"/>
-          <a:lstStyle/>
-          <a:p>
-            <a:pPr indent="0" marL="0">
-              <a:lnSpc>
-                <a:spcPts val="1600"/>
-              </a:lnSpc>
-              <a:buNone/>
-            </a:pPr>
-            <a:r>
-              <a:rPr lang="en-US" sz="1150" dirty="0">
-                <a:solidFill>
-                  <a:srgbClr val="DBE6F7"/>
-                </a:solidFill>
-                <a:latin typeface="Calibri" pitchFamily="34" charset="0"/>
-                <a:ea typeface="Calibri" pitchFamily="34" charset="-122"/>
-                <a:cs typeface="Calibri" pitchFamily="34" charset="-120"/>
-              </a:rPr>
-              <a:t>Bank &amp; counting-machine integration · I4C pipeline ingestion</a:t>
-            </a:r>
-            <a:endParaRPr lang="en-US" sz="1150" dirty="0"/>
-          </a:p>
-        </p:txBody>
-      </p:sp>
-      <p:sp>
-        <p:nvSpPr>
-          <p:cNvPr id="10" name="Shape 8"/>
-          <p:cNvSpPr/>
-          <p:nvPr/>
-        </p:nvSpPr>
-        <p:spPr>
-          <a:xfrm>
-            <a:off x="7955280" y="4114800"/>
-            <a:ext cx="3246120" cy="1371600"/>
-          </a:xfrm>
-          <a:prstGeom prst="roundRect">
-            <a:avLst>
-              <a:gd name="adj" fmla="val 5333"/>
-            </a:avLst>
-          </a:prstGeom>
-          <a:solidFill>
-            <a:srgbClr val="141F38"/>
-          </a:solidFill>
-          <a:ln w="9525">
-            <a:solidFill>
-              <a:srgbClr val="24365C"/>
-            </a:solidFill>
-            <a:prstDash val="solid"/>
-          </a:ln>
-        </p:spPr>
-      </p:sp>
-      <p:sp>
-        <p:nvSpPr>
-          <p:cNvPr id="11" name="Text 9"/>
-          <p:cNvSpPr/>
-          <p:nvPr/>
-        </p:nvSpPr>
-        <p:spPr>
-          <a:xfrm>
-            <a:off x="8138160" y="4251960"/>
-            <a:ext cx="2880360" cy="365760"/>
-          </a:xfrm>
-          <a:prstGeom prst="rect">
-            <a:avLst/>
-          </a:prstGeom>
-          <a:noFill/>
-          <a:ln/>
-        </p:spPr>
-        <p:txBody>
-          <a:bodyPr wrap="square" rtlCol="0" anchor="ctr"/>
-          <a:lstStyle/>
-          <a:p>
-            <a:pPr indent="0" marL="0">
-              <a:buNone/>
-            </a:pPr>
-            <a:r>
-              <a:rPr lang="en-US" sz="1500" b="1" dirty="0">
-                <a:solidFill>
-                  <a:srgbClr val="FBBF24"/>
-                </a:solidFill>
-                <a:latin typeface="Arial" pitchFamily="34" charset="0"/>
-                <a:ea typeface="Arial" pitchFamily="34" charset="-122"/>
-                <a:cs typeface="Arial" pitchFamily="34" charset="-120"/>
-              </a:rPr>
-              <a:t>9–18 mo</a:t>
-            </a:r>
-            <a:endParaRPr lang="en-US" sz="1500" dirty="0"/>
-          </a:p>
-        </p:txBody>
-      </p:sp>
-      <p:sp>
-        <p:nvSpPr>
-          <p:cNvPr id="12" name="Text 10"/>
-          <p:cNvSpPr/>
-          <p:nvPr/>
-        </p:nvSpPr>
-        <p:spPr>
-          <a:xfrm>
-            <a:off x="8138160" y="4617720"/>
-            <a:ext cx="2880360" cy="777240"/>
-          </a:xfrm>
-          <a:prstGeom prst="rect">
-            <a:avLst/>
-          </a:prstGeom>
-          <a:noFill/>
-          <a:ln/>
-        </p:spPr>
-        <p:txBody>
-          <a:bodyPr wrap="square" rtlCol="0" anchor="ctr"/>
-          <a:lstStyle/>
-          <a:p>
-            <a:pPr indent="0" marL="0">
-              <a:lnSpc>
-                <a:spcPts val="1600"/>
-              </a:lnSpc>
-              <a:buNone/>
-            </a:pPr>
-            <a:r>
-              <a:rPr lang="en-US" sz="1150" dirty="0">
-                <a:solidFill>
-                  <a:srgbClr val="DBE6F7"/>
-                </a:solidFill>
-                <a:latin typeface="Calibri" pitchFamily="34" charset="0"/>
-                <a:ea typeface="Calibri" pitchFamily="34" charset="-122"/>
-                <a:cs typeface="Calibri" pitchFamily="34" charset="-120"/>
-              </a:rPr>
-              <a:t>National rollout · deepfake detection · 12-language Citizen Shield</a:t>
-            </a:r>
-            <a:endParaRPr lang="en-US" sz="1150" dirty="0"/>
-          </a:p>
-        </p:txBody>
-      </p:sp>
-      <p:sp>
-        <p:nvSpPr>
-          <p:cNvPr id="13" name="Text 11"/>
-          <p:cNvSpPr/>
-          <p:nvPr/>
-        </p:nvSpPr>
-        <p:spPr>
-          <a:xfrm>
-            <a:off x="457200" y="5943600"/>
-            <a:ext cx="11274552" cy="457200"/>
-          </a:xfrm>
-          <a:prstGeom prst="rect">
-            <a:avLst/>
-          </a:prstGeom>
-          <a:noFill/>
-          <a:ln/>
-        </p:spPr>
-        <p:txBody>
-          <a:bodyPr wrap="square" rtlCol="0" anchor="ctr"/>
-          <a:lstStyle/>
-          <a:p>
-            <a:pPr algn="ctr" indent="0" marL="0">
-              <a:buNone/>
-            </a:pPr>
-            <a:r>
-              <a:rPr lang="en-US" sz="1500" i="1" dirty="0">
+              <a:t>Offline speech model · in-browser vision model · public-domain FTC scam recordings — nothing pre-scored</a:t>
+            </a:r>
+            <a:endParaRPr lang="en-US" sz="1400" dirty="0"/>
+          </a:p>
+        </p:txBody>
+      </p:sp>
+      <p:sp>
+        <p:nvSpPr>
+          <p:cNvPr id="8" name="Text 4"/>
+          <p:cNvSpPr/>
+          <p:nvPr/>
+        </p:nvSpPr>
+        <p:spPr>
+          <a:xfrm>
+            <a:off x="457200" y="6446520"/>
+            <a:ext cx="6400800" cy="320040"/>
+          </a:xfrm>
+          <a:prstGeom prst="rect">
+            <a:avLst/>
+          </a:prstGeom>
+          <a:noFill/>
+          <a:ln/>
+        </p:spPr>
+        <p:txBody>
+          <a:bodyPr wrap="square" rtlCol="0" anchor="ctr"/>
+          <a:lstStyle/>
+          <a:p>
+            <a:pPr indent="0" marL="0">
+              <a:buNone/>
+            </a:pPr>
+            <a:r>
+              <a:rPr lang="en-US" sz="900" dirty="0">
                 <a:solidFill>
                   <a:srgbClr val="8CA0C4"/>
                 </a:solidFill>
@@ -7061,9 +7867,48 @@
                 <a:ea typeface="Calibri" pitchFamily="34" charset="-122"/>
                 <a:cs typeface="Calibri" pitchFamily="34" charset="-120"/>
               </a:rPr>
-              <a:t>PRAHARI · Predict. Protect. Prosecute.</a:t>
-            </a:r>
-            <a:endParaRPr lang="en-US" sz="1500" dirty="0"/>
+              <a:t>PRAHARI — ET AI Hackathon 2.0 · Problem Statement #6</a:t>
+            </a:r>
+            <a:endParaRPr lang="en-US" sz="900" dirty="0"/>
+          </a:p>
+        </p:txBody>
+      </p:sp>
+      <p:sp>
+        <p:nvSpPr>
+          <p:cNvPr id="9" name="Text 5"/>
+          <p:cNvSpPr/>
+          <p:nvPr/>
+        </p:nvSpPr>
+        <p:spPr>
+          <a:xfrm>
+            <a:off x="11430000" y="6446520"/>
+            <a:ext cx="365760" cy="320040"/>
+          </a:xfrm>
+          <a:prstGeom prst="rect">
+            <a:avLst/>
+          </a:prstGeom>
+          <a:noFill/>
+          <a:ln/>
+        </p:spPr>
+        <p:txBody>
+          <a:bodyPr wrap="square" rtlCol="0" anchor="ctr"/>
+          <a:lstStyle/>
+          <a:p>
+            <a:pPr algn="r" indent="0" marL="0">
+              <a:buNone/>
+            </a:pPr>
+            <a:r>
+              <a:rPr lang="en-US" sz="900" dirty="0">
+                <a:solidFill>
+                  <a:srgbClr val="8CA0C4"/>
+                </a:solidFill>
+                <a:latin typeface="Calibri" pitchFamily="34" charset="0"/>
+                <a:ea typeface="Calibri" pitchFamily="34" charset="-122"/>
+                <a:cs typeface="Calibri" pitchFamily="34" charset="-120"/>
+              </a:rPr>
+              <a:t>9</a:t>
+            </a:r>
+            <a:endParaRPr lang="en-US" sz="900" dirty="0"/>
           </a:p>
         </p:txBody>
       </p:sp>
